--- a/yocto_training_all_session_decks/session_decks/D1S5_Yocto_Architecture.pptx
+++ b/yocto_training_all_session_decks/session_decks/D1S5_Yocto_Architecture.pptx
@@ -2936,7 +2936,7 @@
           <a:p>
             <a:fld id="{0CEC647C-F50C-4F78-AA33-D7AA6CDA18EE}" type="datetimeFigureOut">
               <a:rPr lang="en-US" smtClean="0"/>
-              <a:t>5/30/2026</a:t>
+              <a:t>6/8/2026</a:t>
             </a:fld>
             <a:endParaRPr lang="en-US"/>
           </a:p>
@@ -3101,7 +3101,7 @@
           <a:p>
             <a:fld id="{3A83341F-E62C-483B-84B4-966F8BE46097}" type="datetimeFigureOut">
               <a:rPr lang="en-US" smtClean="0"/>
-              <a:t>5/30/2026</a:t>
+              <a:t>6/8/2026</a:t>
             </a:fld>
             <a:endParaRPr lang="en-US"/>
           </a:p>
@@ -5315,13 +5315,22 @@
           <a:lstStyle/>
           <a:p>
             <a:r>
-              <a:rPr sz="3200" b="1">
-                <a:solidFill>
-                  <a:srgbClr val="CC0066"/>
-                </a:solidFill>
-                <a:latin typeface="Calibri"/>
-              </a:rPr>
-              <a:t>Tasks — The Execution Pipeline</a:t>
+              <a:rPr sz="3200" b="1" dirty="0">
+                <a:latin typeface="Calibri"/>
+              </a:rPr>
+              <a:t>Tasks </a:t>
+            </a:r>
+            <a:r>
+              <a:rPr lang="en-IN" sz="3200" b="1" dirty="0">
+                <a:latin typeface="Calibri"/>
+              </a:rPr>
+              <a:t>:</a:t>
+            </a:r>
+            <a:r>
+              <a:rPr sz="3200" b="1" dirty="0">
+                <a:latin typeface="Calibri"/>
+              </a:rPr>
+              <a:t> The Execution Pipeline</a:t>
             </a:r>
           </a:p>
         </p:txBody>
@@ -5335,7 +5344,7 @@
         <p:spPr>
           <a:xfrm>
             <a:off x="822960" y="1417320"/>
-            <a:ext cx="10515600" cy="365760"/>
+            <a:ext cx="10515600" cy="338554"/>
           </a:xfrm>
           <a:prstGeom prst="rect">
             <a:avLst/>
@@ -5350,13 +5359,31 @@
           <a:p>
             <a:pPr algn="l"/>
             <a:r>
-              <a:rPr sz="1500" b="0">
+              <a:rPr sz="1600" b="0" dirty="0">
                 <a:solidFill>
                   <a:srgbClr val="666666"/>
                 </a:solidFill>
                 <a:latin typeface="Calibri"/>
               </a:rPr>
-              <a:t>Each recipe runs a standard chain of tasks. BitBake schedules them.</a:t>
+              <a:t>Each recipe runs a standard chain of tasks. </a:t>
+            </a:r>
+            <a:r>
+              <a:rPr sz="1600" b="0" dirty="0" err="1">
+                <a:solidFill>
+                  <a:srgbClr val="666666"/>
+                </a:solidFill>
+                <a:latin typeface="Calibri"/>
+              </a:rPr>
+              <a:t>BitBake</a:t>
+            </a:r>
+            <a:r>
+              <a:rPr sz="1600" b="0" dirty="0">
+                <a:solidFill>
+                  <a:srgbClr val="666666"/>
+                </a:solidFill>
+                <a:latin typeface="Calibri"/>
+              </a:rPr>
+              <a:t> schedules them.</a:t>
             </a:r>
           </a:p>
         </p:txBody>
@@ -5405,7 +5432,7 @@
           <a:p>
             <a:pPr algn="ctr"/>
             <a:r>
-              <a:rPr sz="1000" b="1">
+              <a:rPr b="1" dirty="0" err="1">
                 <a:solidFill>
                   <a:srgbClr val="663399"/>
                 </a:solidFill>
@@ -5413,6 +5440,12 @@
               </a:rPr>
               <a:t>do_fetch</a:t>
             </a:r>
+            <a:endParaRPr b="1" dirty="0">
+              <a:solidFill>
+                <a:srgbClr val="663399"/>
+              </a:solidFill>
+              <a:latin typeface="Consolas"/>
+            </a:endParaRPr>
           </a:p>
         </p:txBody>
       </p:sp>
@@ -5425,7 +5458,7 @@
         <p:spPr>
           <a:xfrm>
             <a:off x="457200" y="2788920"/>
-            <a:ext cx="1298448" cy="320040"/>
+            <a:ext cx="1298448" cy="338554"/>
           </a:xfrm>
           <a:prstGeom prst="rect">
             <a:avLst/>
@@ -5440,7 +5473,7 @@
           <a:p>
             <a:pPr algn="ctr"/>
             <a:r>
-              <a:rPr sz="900" b="0">
+              <a:rPr sz="1600" b="0">
                 <a:solidFill>
                   <a:srgbClr val="666666"/>
                 </a:solidFill>
@@ -5495,7 +5528,7 @@
           <a:p>
             <a:pPr algn="ctr"/>
             <a:r>
-              <a:rPr sz="1000" b="1">
+              <a:rPr b="1" dirty="0" err="1">
                 <a:solidFill>
                   <a:srgbClr val="663399"/>
                 </a:solidFill>
@@ -5503,6 +5536,12 @@
               </a:rPr>
               <a:t>do_unpack</a:t>
             </a:r>
+            <a:endParaRPr b="1" dirty="0">
+              <a:solidFill>
+                <a:srgbClr val="663399"/>
+              </a:solidFill>
+              <a:latin typeface="Consolas"/>
+            </a:endParaRPr>
           </a:p>
         </p:txBody>
       </p:sp>
@@ -5515,7 +5554,7 @@
         <p:spPr>
           <a:xfrm>
             <a:off x="1801368" y="2788920"/>
-            <a:ext cx="1298448" cy="320040"/>
+            <a:ext cx="1298448" cy="338554"/>
           </a:xfrm>
           <a:prstGeom prst="rect">
             <a:avLst/>
@@ -5530,7 +5569,7 @@
           <a:p>
             <a:pPr algn="ctr"/>
             <a:r>
-              <a:rPr sz="900" b="0">
+              <a:rPr sz="1600" b="0">
                 <a:solidFill>
                   <a:srgbClr val="666666"/>
                 </a:solidFill>
@@ -5585,7 +5624,7 @@
           <a:p>
             <a:pPr algn="ctr"/>
             <a:r>
-              <a:rPr sz="1000" b="1">
+              <a:rPr b="1">
                 <a:solidFill>
                   <a:srgbClr val="663399"/>
                 </a:solidFill>
@@ -5605,7 +5644,7 @@
         <p:spPr>
           <a:xfrm>
             <a:off x="3145536" y="2788920"/>
-            <a:ext cx="1298448" cy="320040"/>
+            <a:ext cx="1298448" cy="338554"/>
           </a:xfrm>
           <a:prstGeom prst="rect">
             <a:avLst/>
@@ -5620,7 +5659,7 @@
           <a:p>
             <a:pPr algn="ctr"/>
             <a:r>
-              <a:rPr sz="900" b="0">
+              <a:rPr sz="1600" b="0">
                 <a:solidFill>
                   <a:srgbClr val="666666"/>
                 </a:solidFill>
@@ -5675,7 +5714,7 @@
           <a:p>
             <a:pPr algn="ctr"/>
             <a:r>
-              <a:rPr sz="1000" b="1">
+              <a:rPr b="1">
                 <a:solidFill>
                   <a:srgbClr val="663399"/>
                 </a:solidFill>
@@ -5695,7 +5734,7 @@
         <p:spPr>
           <a:xfrm>
             <a:off x="4489704" y="2788920"/>
-            <a:ext cx="1298448" cy="320040"/>
+            <a:ext cx="1298448" cy="584775"/>
           </a:xfrm>
           <a:prstGeom prst="rect">
             <a:avLst/>
@@ -5710,7 +5749,7 @@
           <a:p>
             <a:pPr algn="ctr"/>
             <a:r>
-              <a:rPr sz="900" b="0">
+              <a:rPr sz="1600" b="0">
                 <a:solidFill>
                   <a:srgbClr val="666666"/>
                 </a:solidFill>
@@ -5765,7 +5804,7 @@
           <a:p>
             <a:pPr algn="ctr"/>
             <a:r>
-              <a:rPr sz="1000" b="1">
+              <a:rPr b="1">
                 <a:solidFill>
                   <a:srgbClr val="663399"/>
                 </a:solidFill>
@@ -5785,7 +5824,7 @@
         <p:spPr>
           <a:xfrm>
             <a:off x="5833872" y="2788920"/>
-            <a:ext cx="1298448" cy="320040"/>
+            <a:ext cx="1298448" cy="338554"/>
           </a:xfrm>
           <a:prstGeom prst="rect">
             <a:avLst/>
@@ -5800,7 +5839,7 @@
           <a:p>
             <a:pPr algn="ctr"/>
             <a:r>
-              <a:rPr sz="900" b="0">
+              <a:rPr sz="1600" b="0">
                 <a:solidFill>
                   <a:srgbClr val="666666"/>
                 </a:solidFill>
@@ -5855,7 +5894,7 @@
           <a:p>
             <a:pPr algn="ctr"/>
             <a:r>
-              <a:rPr sz="1000" b="1">
+              <a:rPr b="1">
                 <a:solidFill>
                   <a:srgbClr val="663399"/>
                 </a:solidFill>
@@ -5875,7 +5914,7 @@
         <p:spPr>
           <a:xfrm>
             <a:off x="7178040" y="2788920"/>
-            <a:ext cx="1298448" cy="320040"/>
+            <a:ext cx="1298448" cy="584775"/>
           </a:xfrm>
           <a:prstGeom prst="rect">
             <a:avLst/>
@@ -5890,7 +5929,7 @@
           <a:p>
             <a:pPr algn="ctr"/>
             <a:r>
-              <a:rPr sz="900" b="0">
+              <a:rPr sz="1600" b="0">
                 <a:solidFill>
                   <a:srgbClr val="666666"/>
                 </a:solidFill>
@@ -5945,7 +5984,7 @@
           <a:p>
             <a:pPr algn="ctr"/>
             <a:r>
-              <a:rPr sz="1000" b="1">
+              <a:rPr b="1">
                 <a:solidFill>
                   <a:srgbClr val="663399"/>
                 </a:solidFill>
@@ -5965,7 +6004,7 @@
         <p:spPr>
           <a:xfrm>
             <a:off x="8522208" y="2788920"/>
-            <a:ext cx="1298448" cy="320040"/>
+            <a:ext cx="1298448" cy="584775"/>
           </a:xfrm>
           <a:prstGeom prst="rect">
             <a:avLst/>
@@ -5980,7 +6019,7 @@
           <a:p>
             <a:pPr algn="ctr"/>
             <a:r>
-              <a:rPr sz="900" b="0">
+              <a:rPr sz="1600" b="0">
                 <a:solidFill>
                   <a:srgbClr val="666666"/>
                 </a:solidFill>
@@ -6035,7 +6074,7 @@
           <a:p>
             <a:pPr algn="ctr"/>
             <a:r>
-              <a:rPr sz="1000" b="1">
+              <a:rPr b="1">
                 <a:solidFill>
                   <a:srgbClr val="663399"/>
                 </a:solidFill>
@@ -6055,7 +6094,7 @@
         <p:spPr>
           <a:xfrm>
             <a:off x="9866376" y="2788920"/>
-            <a:ext cx="1298448" cy="320040"/>
+            <a:ext cx="1298448" cy="338554"/>
           </a:xfrm>
           <a:prstGeom prst="rect">
             <a:avLst/>
@@ -6070,7 +6109,7 @@
           <a:p>
             <a:pPr algn="ctr"/>
             <a:r>
-              <a:rPr sz="900" b="0">
+              <a:rPr sz="1600" b="0">
                 <a:solidFill>
                   <a:srgbClr val="666666"/>
                 </a:solidFill>
@@ -6090,7 +6129,7 @@
         <p:spPr>
           <a:xfrm>
             <a:off x="822960" y="3657600"/>
-            <a:ext cx="10515600" cy="2286000"/>
+            <a:ext cx="10515600" cy="1590179"/>
           </a:xfrm>
           <a:prstGeom prst="rect">
             <a:avLst/>
@@ -6109,7 +6148,7 @@
               </a:spcAft>
             </a:pPr>
             <a:r>
-              <a:rPr sz="1600" b="1">
+              <a:rPr sz="2000" b="1" dirty="0">
                 <a:solidFill>
                   <a:srgbClr val="CC0066"/>
                 </a:solidFill>
@@ -6125,7 +6164,7 @@
               </a:spcAft>
             </a:pPr>
             <a:r>
-              <a:rPr sz="1300" b="0">
+              <a:rPr sz="1600" b="0" dirty="0">
                 <a:solidFill>
                   <a:srgbClr val="333333"/>
                 </a:solidFill>
@@ -6141,14 +6180,65 @@
               </a:spcAft>
             </a:pPr>
             <a:r>
-              <a:rPr sz="1300" b="0">
+              <a:rPr sz="1600" b="0" dirty="0">
                 <a:solidFill>
                   <a:srgbClr val="333333"/>
                 </a:solidFill>
                 <a:latin typeface="Consolas"/>
               </a:rPr>
-              <a:t>• Inspect at any step: bitbake busybox -c devshell</a:t>
-            </a:r>
+              <a:t>• Inspect at any step: </a:t>
+            </a:r>
+            <a:r>
+              <a:rPr sz="1600" b="0" dirty="0" err="1">
+                <a:solidFill>
+                  <a:srgbClr val="333333"/>
+                </a:solidFill>
+                <a:latin typeface="Consolas"/>
+              </a:rPr>
+              <a:t>bitbake</a:t>
+            </a:r>
+            <a:r>
+              <a:rPr sz="1600" b="0" dirty="0">
+                <a:solidFill>
+                  <a:srgbClr val="333333"/>
+                </a:solidFill>
+                <a:latin typeface="Consolas"/>
+              </a:rPr>
+              <a:t> </a:t>
+            </a:r>
+            <a:r>
+              <a:rPr sz="1600" b="0" dirty="0" err="1">
+                <a:solidFill>
+                  <a:srgbClr val="333333"/>
+                </a:solidFill>
+                <a:latin typeface="Consolas"/>
+              </a:rPr>
+              <a:t>busybox</a:t>
+            </a:r>
+            <a:r>
+              <a:rPr sz="1600" b="0" dirty="0">
+                <a:solidFill>
+                  <a:srgbClr val="333333"/>
+                </a:solidFill>
+                <a:latin typeface="Consolas"/>
+              </a:rPr>
+              <a:t> -c </a:t>
+            </a:r>
+            <a:r>
+              <a:rPr sz="1600" b="0" dirty="0" err="1">
+                <a:solidFill>
+                  <a:srgbClr val="333333"/>
+                </a:solidFill>
+                <a:latin typeface="Consolas"/>
+              </a:rPr>
+              <a:t>devshell</a:t>
+            </a:r>
+            <a:endParaRPr sz="1600" b="0" dirty="0">
+              <a:solidFill>
+                <a:srgbClr val="333333"/>
+              </a:solidFill>
+              <a:latin typeface="Consolas"/>
+            </a:endParaRPr>
           </a:p>
           <a:p>
             <a:pPr>
@@ -6157,13 +6247,49 @@
               </a:spcAft>
             </a:pPr>
             <a:r>
-              <a:rPr sz="1300" b="0">
+              <a:rPr sz="1600" b="0" dirty="0">
                 <a:solidFill>
                   <a:srgbClr val="333333"/>
                 </a:solidFill>
                 <a:latin typeface="Consolas"/>
               </a:rPr>
-              <a:t>• Re-run one task: bitbake busybox -c compile -f</a:t>
+              <a:t>• Re-run one task: </a:t>
+            </a:r>
+            <a:r>
+              <a:rPr sz="1600" b="0" dirty="0" err="1">
+                <a:solidFill>
+                  <a:srgbClr val="333333"/>
+                </a:solidFill>
+                <a:latin typeface="Consolas"/>
+              </a:rPr>
+              <a:t>bitbake</a:t>
+            </a:r>
+            <a:r>
+              <a:rPr sz="1600" b="0" dirty="0">
+                <a:solidFill>
+                  <a:srgbClr val="333333"/>
+                </a:solidFill>
+                <a:latin typeface="Consolas"/>
+              </a:rPr>
+              <a:t> </a:t>
+            </a:r>
+            <a:r>
+              <a:rPr sz="1600" b="0" dirty="0" err="1">
+                <a:solidFill>
+                  <a:srgbClr val="333333"/>
+                </a:solidFill>
+                <a:latin typeface="Consolas"/>
+              </a:rPr>
+              <a:t>busybox</a:t>
+            </a:r>
+            <a:r>
+              <a:rPr sz="1600" b="0" dirty="0">
+                <a:solidFill>
+                  <a:srgbClr val="333333"/>
+                </a:solidFill>
+                <a:latin typeface="Consolas"/>
+              </a:rPr>
+              <a:t> -c compile -f</a:t>
             </a:r>
           </a:p>
           <a:p>
@@ -6173,13 +6299,31 @@
               </a:spcAft>
             </a:pPr>
             <a:r>
-              <a:rPr sz="1300" b="0">
-                <a:solidFill>
-                  <a:srgbClr val="333333"/>
-                </a:solidFill>
-                <a:latin typeface="Calibri"/>
-              </a:rPr>
-              <a:t>• Custom tasks added via addtask in recipe</a:t>
+              <a:rPr sz="1600" b="0" dirty="0">
+                <a:solidFill>
+                  <a:srgbClr val="333333"/>
+                </a:solidFill>
+                <a:latin typeface="Calibri"/>
+              </a:rPr>
+              <a:t>• Custom tasks added via </a:t>
+            </a:r>
+            <a:r>
+              <a:rPr sz="1600" b="0" dirty="0" err="1">
+                <a:solidFill>
+                  <a:srgbClr val="333333"/>
+                </a:solidFill>
+                <a:latin typeface="Calibri"/>
+              </a:rPr>
+              <a:t>addtask</a:t>
+            </a:r>
+            <a:r>
+              <a:rPr sz="1600" b="0" dirty="0">
+                <a:solidFill>
+                  <a:srgbClr val="333333"/>
+                </a:solidFill>
+                <a:latin typeface="Calibri"/>
+              </a:rPr>
+              <a:t> in recipe</a:t>
             </a:r>
           </a:p>
         </p:txBody>
@@ -6225,13 +6369,22 @@
           <a:lstStyle/>
           <a:p>
             <a:r>
-              <a:rPr sz="3200" b="1">
-                <a:solidFill>
-                  <a:srgbClr val="CC0066"/>
-                </a:solidFill>
-                <a:latin typeface="Calibri"/>
-              </a:rPr>
-              <a:t>Dependencies — Build vs Runtime</a:t>
+              <a:rPr sz="3200" b="1" dirty="0">
+                <a:latin typeface="Calibri"/>
+              </a:rPr>
+              <a:t>Dependencies </a:t>
+            </a:r>
+            <a:r>
+              <a:rPr lang="en-IN" sz="3200" b="1" dirty="0">
+                <a:latin typeface="Calibri"/>
+              </a:rPr>
+              <a:t>:</a:t>
+            </a:r>
+            <a:r>
+              <a:rPr sz="3200" b="1" dirty="0">
+                <a:latin typeface="Calibri"/>
+              </a:rPr>
+              <a:t> Build vs Runtime</a:t>
             </a:r>
           </a:p>
         </p:txBody>
@@ -6245,7 +6398,7 @@
         <p:spPr>
           <a:xfrm>
             <a:off x="822960" y="1417320"/>
-            <a:ext cx="10515600" cy="365760"/>
+            <a:ext cx="10515600" cy="338554"/>
           </a:xfrm>
           <a:prstGeom prst="rect">
             <a:avLst/>
@@ -6260,7 +6413,7 @@
           <a:p>
             <a:pPr algn="l"/>
             <a:r>
-              <a:rPr sz="1500" b="0">
+              <a:rPr sz="1600" b="0" dirty="0">
                 <a:solidFill>
                   <a:srgbClr val="666666"/>
                 </a:solidFill>
@@ -6362,7 +6515,7 @@
         <p:spPr>
           <a:xfrm>
             <a:off x="960120" y="2560320"/>
-            <a:ext cx="4937760" cy="3200400"/>
+            <a:ext cx="4937760" cy="2769989"/>
           </a:xfrm>
           <a:prstGeom prst="rect">
             <a:avLst/>
@@ -6381,7 +6534,7 @@
               </a:spcAft>
             </a:pPr>
             <a:r>
-              <a:rPr sz="1400" b="1">
+              <a:rPr sz="2000" b="1" dirty="0">
                 <a:solidFill>
                   <a:srgbClr val="333333"/>
                 </a:solidFill>
@@ -6397,14 +6550,29 @@
               </a:spcAft>
             </a:pPr>
             <a:r>
-              <a:rPr sz="1300" b="0">
-                <a:solidFill>
-                  <a:srgbClr val="333333"/>
-                </a:solidFill>
-                <a:latin typeface="Calibri"/>
-              </a:rPr>
-              <a:t>• Resolved before do_compile</a:t>
-            </a:r>
+              <a:rPr b="0" dirty="0">
+                <a:solidFill>
+                  <a:srgbClr val="333333"/>
+                </a:solidFill>
+                <a:latin typeface="Calibri"/>
+              </a:rPr>
+              <a:t>• Resolved before </a:t>
+            </a:r>
+            <a:r>
+              <a:rPr b="0" dirty="0" err="1">
+                <a:solidFill>
+                  <a:srgbClr val="333333"/>
+                </a:solidFill>
+                <a:latin typeface="Calibri"/>
+              </a:rPr>
+              <a:t>do_compile</a:t>
+            </a:r>
+            <a:endParaRPr b="0" dirty="0">
+              <a:solidFill>
+                <a:srgbClr val="333333"/>
+              </a:solidFill>
+              <a:latin typeface="Calibri"/>
+            </a:endParaRPr>
           </a:p>
           <a:p>
             <a:pPr>
@@ -6413,7 +6581,7 @@
               </a:spcAft>
             </a:pPr>
             <a:r>
-              <a:rPr sz="1300" b="0">
+              <a:rPr b="0" dirty="0">
                 <a:solidFill>
                   <a:srgbClr val="333333"/>
                 </a:solidFill>
@@ -6429,14 +6597,29 @@
               </a:spcAft>
             </a:pPr>
             <a:r>
-              <a:rPr sz="1300" b="0">
-                <a:solidFill>
-                  <a:srgbClr val="333333"/>
-                </a:solidFill>
-                <a:latin typeface="Calibri"/>
-              </a:rPr>
-              <a:t>• Pulls headers, libraries, tools into sysroot</a:t>
-            </a:r>
+              <a:rPr b="0" dirty="0">
+                <a:solidFill>
+                  <a:srgbClr val="333333"/>
+                </a:solidFill>
+                <a:latin typeface="Calibri"/>
+              </a:rPr>
+              <a:t>• Pulls headers, libraries, tools into </a:t>
+            </a:r>
+            <a:r>
+              <a:rPr b="0" dirty="0" err="1">
+                <a:solidFill>
+                  <a:srgbClr val="333333"/>
+                </a:solidFill>
+                <a:latin typeface="Calibri"/>
+              </a:rPr>
+              <a:t>sysroot</a:t>
+            </a:r>
+            <a:endParaRPr b="0" dirty="0">
+              <a:solidFill>
+                <a:srgbClr val="333333"/>
+              </a:solidFill>
+              <a:latin typeface="Calibri"/>
+            </a:endParaRPr>
           </a:p>
           <a:p>
             <a:pPr>
@@ -6445,7 +6628,7 @@
               </a:spcAft>
             </a:pPr>
             <a:r>
-              <a:rPr sz="1300" b="1">
+              <a:rPr b="1" dirty="0">
                 <a:solidFill>
                   <a:srgbClr val="663399"/>
                 </a:solidFill>
@@ -6461,13 +6644,49 @@
               </a:spcAft>
             </a:pPr>
             <a:r>
-              <a:rPr sz="1100" b="0">
+              <a:rPr sz="1600" b="0" dirty="0">
                 <a:solidFill>
                   <a:srgbClr val="333333"/>
                 </a:solidFill>
                 <a:latin typeface="Consolas"/>
               </a:rPr>
-              <a:t>DEPENDS = "openssl zlib libxml2"</a:t>
+              <a:t>DEPENDS = "</a:t>
+            </a:r>
+            <a:r>
+              <a:rPr sz="1600" b="0" dirty="0" err="1">
+                <a:solidFill>
+                  <a:srgbClr val="333333"/>
+                </a:solidFill>
+                <a:latin typeface="Consolas"/>
+              </a:rPr>
+              <a:t>openssl</a:t>
+            </a:r>
+            <a:r>
+              <a:rPr sz="1600" b="0" dirty="0">
+                <a:solidFill>
+                  <a:srgbClr val="333333"/>
+                </a:solidFill>
+                <a:latin typeface="Consolas"/>
+              </a:rPr>
+              <a:t> </a:t>
+            </a:r>
+            <a:r>
+              <a:rPr sz="1600" b="0" dirty="0" err="1">
+                <a:solidFill>
+                  <a:srgbClr val="333333"/>
+                </a:solidFill>
+                <a:latin typeface="Consolas"/>
+              </a:rPr>
+              <a:t>zlib</a:t>
+            </a:r>
+            <a:r>
+              <a:rPr sz="1600" b="0" dirty="0">
+                <a:solidFill>
+                  <a:srgbClr val="333333"/>
+                </a:solidFill>
+                <a:latin typeface="Consolas"/>
+              </a:rPr>
+              <a:t> libxml2"</a:t>
             </a:r>
           </a:p>
           <a:p>
@@ -6477,7 +6696,7 @@
               </a:spcAft>
             </a:pPr>
             <a:r>
-              <a:rPr sz="1200" b="0">
+              <a:rPr b="0" dirty="0">
                 <a:solidFill>
                   <a:srgbClr val="666666"/>
                 </a:solidFill>
@@ -6579,7 +6798,7 @@
         <p:spPr>
           <a:xfrm>
             <a:off x="6400800" y="2560320"/>
-            <a:ext cx="4937760" cy="3200400"/>
+            <a:ext cx="4937760" cy="2769989"/>
           </a:xfrm>
           <a:prstGeom prst="rect">
             <a:avLst/>
@@ -6598,7 +6817,7 @@
               </a:spcAft>
             </a:pPr>
             <a:r>
-              <a:rPr sz="1400" b="1">
+              <a:rPr sz="2000" b="1">
                 <a:solidFill>
                   <a:srgbClr val="333333"/>
                 </a:solidFill>
@@ -6614,7 +6833,7 @@
               </a:spcAft>
             </a:pPr>
             <a:r>
-              <a:rPr sz="1300" b="0">
+              <a:rPr b="0">
                 <a:solidFill>
                   <a:srgbClr val="333333"/>
                 </a:solidFill>
@@ -6630,7 +6849,7 @@
               </a:spcAft>
             </a:pPr>
             <a:r>
-              <a:rPr sz="1300" b="0">
+              <a:rPr b="0">
                 <a:solidFill>
                   <a:srgbClr val="333333"/>
                 </a:solidFill>
@@ -6646,7 +6865,7 @@
               </a:spcAft>
             </a:pPr>
             <a:r>
-              <a:rPr sz="1300" b="0">
+              <a:rPr b="0">
                 <a:solidFill>
                   <a:srgbClr val="333333"/>
                 </a:solidFill>
@@ -6662,7 +6881,7 @@
               </a:spcAft>
             </a:pPr>
             <a:r>
-              <a:rPr sz="1300" b="1">
+              <a:rPr b="1">
                 <a:solidFill>
                   <a:srgbClr val="CC0066"/>
                 </a:solidFill>
@@ -6678,7 +6897,7 @@
               </a:spcAft>
             </a:pPr>
             <a:r>
-              <a:rPr sz="1100" b="0">
+              <a:rPr sz="1600" b="0">
                 <a:solidFill>
                   <a:srgbClr val="333333"/>
                 </a:solidFill>
@@ -6694,7 +6913,7 @@
               </a:spcAft>
             </a:pPr>
             <a:r>
-              <a:rPr sz="1200" b="0">
+              <a:rPr b="0">
                 <a:solidFill>
                   <a:srgbClr val="666666"/>
                 </a:solidFill>
@@ -6714,7 +6933,7 @@
         <p:spPr>
           <a:xfrm>
             <a:off x="822960" y="6035040"/>
-            <a:ext cx="10561320" cy="365760"/>
+            <a:ext cx="10561320" cy="338554"/>
           </a:xfrm>
           <a:prstGeom prst="rect">
             <a:avLst/>
@@ -6729,7 +6948,7 @@
           <a:p>
             <a:pPr algn="l"/>
             <a:r>
-              <a:rPr sz="1300" b="1">
+              <a:rPr sz="1600" b="1" dirty="0">
                 <a:solidFill>
                   <a:srgbClr val="CC0066"/>
                 </a:solidFill>
@@ -6781,13 +7000,28 @@
           <a:lstStyle/>
           <a:p>
             <a:r>
-              <a:rPr sz="3200" b="1">
-                <a:solidFill>
-                  <a:srgbClr val="CC0066"/>
-                </a:solidFill>
-                <a:latin typeface="Calibri"/>
-              </a:rPr>
-              <a:t>sstate Cache — Why Builds Get Faster</a:t>
+              <a:rPr sz="3200" b="1" dirty="0" err="1">
+                <a:latin typeface="Calibri"/>
+              </a:rPr>
+              <a:t>sstate</a:t>
+            </a:r>
+            <a:r>
+              <a:rPr sz="3200" b="1" dirty="0">
+                <a:latin typeface="Calibri"/>
+              </a:rPr>
+              <a:t> Cache </a:t>
+            </a:r>
+            <a:r>
+              <a:rPr lang="en-IN" sz="3200" b="1" dirty="0">
+                <a:latin typeface="Calibri"/>
+              </a:rPr>
+              <a:t>:</a:t>
+            </a:r>
+            <a:r>
+              <a:rPr sz="3200" b="1" dirty="0">
+                <a:latin typeface="Calibri"/>
+              </a:rPr>
+              <a:t> Why Builds Get Faster</a:t>
             </a:r>
           </a:p>
         </p:txBody>
@@ -6801,7 +7035,7 @@
         <p:spPr>
           <a:xfrm>
             <a:off x="822960" y="1417320"/>
-            <a:ext cx="10515600" cy="365760"/>
+            <a:ext cx="10515600" cy="338554"/>
           </a:xfrm>
           <a:prstGeom prst="rect">
             <a:avLst/>
@@ -6816,7 +7050,7 @@
           <a:p>
             <a:pPr algn="l"/>
             <a:r>
-              <a:rPr sz="1500" b="0">
+              <a:rPr sz="1600" b="0">
                 <a:solidFill>
                   <a:srgbClr val="666666"/>
                 </a:solidFill>
@@ -6836,7 +7070,7 @@
         <p:spPr>
           <a:xfrm>
             <a:off x="822960" y="1874519"/>
-            <a:ext cx="5943600" cy="4297680"/>
+            <a:ext cx="5943600" cy="4093428"/>
           </a:xfrm>
           <a:prstGeom prst="rect">
             <a:avLst/>
@@ -6855,7 +7089,7 @@
               </a:spcAft>
             </a:pPr>
             <a:r>
-              <a:rPr sz="1700" b="1">
+              <a:rPr sz="2000" b="1" dirty="0">
                 <a:solidFill>
                   <a:srgbClr val="CC0066"/>
                 </a:solidFill>
@@ -6871,13 +7105,31 @@
               </a:spcAft>
             </a:pPr>
             <a:r>
-              <a:rPr sz="1300" b="0">
-                <a:solidFill>
-                  <a:srgbClr val="333333"/>
-                </a:solidFill>
-                <a:latin typeface="Calibri"/>
-              </a:rPr>
-              <a:t>• Every task gets a signature — a hash of all its inputs</a:t>
+              <a:rPr sz="1600" b="0" dirty="0">
+                <a:solidFill>
+                  <a:srgbClr val="333333"/>
+                </a:solidFill>
+                <a:latin typeface="Calibri"/>
+              </a:rPr>
+              <a:t>• Every task gets a signature</a:t>
+            </a:r>
+            <a:r>
+              <a:rPr lang="en-IN" sz="1600" b="0" dirty="0">
+                <a:solidFill>
+                  <a:srgbClr val="333333"/>
+                </a:solidFill>
+                <a:latin typeface="Calibri"/>
+              </a:rPr>
+              <a:t>,</a:t>
+            </a:r>
+            <a:r>
+              <a:rPr sz="1600" b="0" dirty="0">
+                <a:solidFill>
+                  <a:srgbClr val="333333"/>
+                </a:solidFill>
+                <a:latin typeface="Calibri"/>
+              </a:rPr>
+              <a:t> a hash of all its inputs</a:t>
             </a:r>
           </a:p>
           <a:p>
@@ -6887,7 +7139,7 @@
               </a:spcAft>
             </a:pPr>
             <a:r>
-              <a:rPr sz="1300" b="0">
+              <a:rPr sz="1600" b="0" dirty="0">
                 <a:solidFill>
                   <a:srgbClr val="333333"/>
                 </a:solidFill>
@@ -6903,7 +7155,7 @@
               </a:spcAft>
             </a:pPr>
             <a:r>
-              <a:rPr sz="1300" b="0">
+              <a:rPr sz="1600" b="0" dirty="0">
                 <a:solidFill>
                   <a:srgbClr val="333333"/>
                 </a:solidFill>
@@ -6919,7 +7171,7 @@
               </a:spcAft>
             </a:pPr>
             <a:r>
-              <a:rPr sz="1700" b="1">
+              <a:rPr sz="2000" b="1" dirty="0">
                 <a:solidFill>
                   <a:srgbClr val="CC0066"/>
                 </a:solidFill>
@@ -6935,7 +7187,7 @@
               </a:spcAft>
             </a:pPr>
             <a:r>
-              <a:rPr sz="1300" b="0">
+              <a:rPr sz="1600" b="0" dirty="0">
                 <a:solidFill>
                   <a:srgbClr val="333333"/>
                 </a:solidFill>
@@ -6951,7 +7203,7 @@
               </a:spcAft>
             </a:pPr>
             <a:r>
-              <a:rPr sz="1300" b="0">
+              <a:rPr sz="1600" b="0" dirty="0">
                 <a:solidFill>
                   <a:srgbClr val="333333"/>
                 </a:solidFill>
@@ -6967,7 +7219,7 @@
               </a:spcAft>
             </a:pPr>
             <a:r>
-              <a:rPr sz="1300" b="0">
+              <a:rPr sz="1600" b="0" dirty="0">
                 <a:solidFill>
                   <a:srgbClr val="333333"/>
                 </a:solidFill>
@@ -6983,7 +7235,7 @@
               </a:spcAft>
             </a:pPr>
             <a:r>
-              <a:rPr sz="1700" b="1">
+              <a:rPr sz="2000" b="1" dirty="0">
                 <a:solidFill>
                   <a:srgbClr val="CC0066"/>
                 </a:solidFill>
@@ -6999,13 +7251,49 @@
               </a:spcAft>
             </a:pPr>
             <a:r>
-              <a:rPr sz="1300" b="0">
-                <a:solidFill>
-                  <a:srgbClr val="333333"/>
-                </a:solidFill>
-                <a:latin typeface="Calibri"/>
-              </a:rPr>
-              <a:t>• Set up a shared sstate mirror — everyone benefits from one teammate's build</a:t>
+              <a:rPr sz="1600" b="0" dirty="0">
+                <a:solidFill>
+                  <a:srgbClr val="333333"/>
+                </a:solidFill>
+                <a:latin typeface="Calibri"/>
+              </a:rPr>
+              <a:t>• Set up a shared </a:t>
+            </a:r>
+            <a:r>
+              <a:rPr sz="1600" b="0" dirty="0" err="1">
+                <a:solidFill>
+                  <a:srgbClr val="333333"/>
+                </a:solidFill>
+                <a:latin typeface="Calibri"/>
+              </a:rPr>
+              <a:t>sstate</a:t>
+            </a:r>
+            <a:r>
+              <a:rPr sz="1600" b="0" dirty="0">
+                <a:solidFill>
+                  <a:srgbClr val="333333"/>
+                </a:solidFill>
+                <a:latin typeface="Calibri"/>
+              </a:rPr>
+              <a:t> mirror</a:t>
+            </a:r>
+            <a:r>
+              <a:rPr lang="en-IN" sz="1600" b="0" dirty="0">
+                <a:solidFill>
+                  <a:srgbClr val="333333"/>
+                </a:solidFill>
+                <a:latin typeface="Calibri"/>
+              </a:rPr>
+              <a:t>, </a:t>
+            </a:r>
+            <a:r>
+              <a:rPr sz="1600" b="0" dirty="0">
+                <a:solidFill>
+                  <a:srgbClr val="333333"/>
+                </a:solidFill>
+                <a:latin typeface="Calibri"/>
+              </a:rPr>
+              <a:t>everyone benefits from one teammate's build</a:t>
             </a:r>
           </a:p>
           <a:p>
@@ -7015,7 +7303,7 @@
               </a:spcAft>
             </a:pPr>
             <a:r>
-              <a:rPr sz="1300" b="0">
+              <a:rPr sz="1600" b="0" dirty="0">
                 <a:solidFill>
                   <a:srgbClr val="333333"/>
                 </a:solidFill>
@@ -7162,7 +7450,7 @@
         <p:spPr>
           <a:xfrm>
             <a:off x="7223760" y="2377440"/>
-            <a:ext cx="4114800" cy="3474720"/>
+            <a:ext cx="4114800" cy="3046988"/>
           </a:xfrm>
           <a:prstGeom prst="rect">
             <a:avLst/>
@@ -7181,7 +7469,7 @@
               </a:spcAft>
             </a:pPr>
             <a:r>
-              <a:rPr sz="1000" i="1">
+              <a:rPr sz="1600" i="1">
                 <a:solidFill>
                   <a:srgbClr val="808080"/>
                 </a:solidFill>
@@ -7197,7 +7485,7 @@
               </a:spcAft>
             </a:pPr>
             <a:r>
-              <a:rPr sz="1000">
+              <a:rPr sz="1600">
                 <a:solidFill>
                   <a:srgbClr val="2D2D2D"/>
                 </a:solidFill>
@@ -7213,7 +7501,7 @@
               </a:spcAft>
             </a:pPr>
             <a:r>
-              <a:rPr sz="1000">
+              <a:rPr sz="1600">
                 <a:solidFill>
                   <a:srgbClr val="2D2D2D"/>
                 </a:solidFill>
@@ -7229,7 +7517,7 @@
               </a:spcAft>
             </a:pPr>
             <a:r>
-              <a:rPr sz="1000">
+              <a:rPr sz="1600">
                 <a:solidFill>
                   <a:srgbClr val="2D2D2D"/>
                 </a:solidFill>
@@ -7245,7 +7533,7 @@
               </a:spcAft>
             </a:pPr>
             <a:r>
-              <a:rPr sz="1000">
+              <a:rPr sz="1600">
                 <a:solidFill>
                   <a:srgbClr val="2D2D2D"/>
                 </a:solidFill>
@@ -7261,7 +7549,7 @@
               </a:spcAft>
             </a:pPr>
             <a:r>
-              <a:rPr sz="1000" i="1">
+              <a:rPr sz="1600" i="1">
                 <a:solidFill>
                   <a:srgbClr val="808080"/>
                 </a:solidFill>
@@ -7277,7 +7565,7 @@
               </a:spcAft>
             </a:pPr>
             <a:r>
-              <a:rPr sz="1000">
+              <a:rPr sz="1600">
                 <a:solidFill>
                   <a:srgbClr val="2D2D2D"/>
                 </a:solidFill>
@@ -7293,7 +7581,7 @@
               </a:spcAft>
             </a:pPr>
             <a:r>
-              <a:rPr sz="1000">
+              <a:rPr sz="1600">
                 <a:solidFill>
                   <a:srgbClr val="2D2D2D"/>
                 </a:solidFill>
@@ -7309,7 +7597,7 @@
               </a:spcAft>
             </a:pPr>
             <a:r>
-              <a:rPr sz="1000">
+              <a:rPr sz="1600">
                 <a:solidFill>
                   <a:srgbClr val="2D2D2D"/>
                 </a:solidFill>
@@ -7325,7 +7613,7 @@
               </a:spcAft>
             </a:pPr>
             <a:r>
-              <a:rPr sz="1000">
+              <a:rPr sz="1600">
                 <a:solidFill>
                   <a:srgbClr val="2D2D2D"/>
                 </a:solidFill>
@@ -7341,7 +7629,7 @@
               </a:spcAft>
             </a:pPr>
             <a:r>
-              <a:rPr sz="1000" i="1">
+              <a:rPr sz="1600" i="1">
                 <a:solidFill>
                   <a:srgbClr val="808080"/>
                 </a:solidFill>
@@ -7357,7 +7645,7 @@
               </a:spcAft>
             </a:pPr>
             <a:r>
-              <a:rPr sz="1000">
+              <a:rPr sz="1600">
                 <a:solidFill>
                   <a:srgbClr val="2D2D2D"/>
                 </a:solidFill>
@@ -7409,10 +7697,7 @@
           <a:lstStyle/>
           <a:p>
             <a:r>
-              <a:rPr sz="3200" b="1">
-                <a:solidFill>
-                  <a:srgbClr val="CC0066"/>
-                </a:solidFill>
+              <a:rPr sz="3200" b="1" dirty="0">
                 <a:latin typeface="Calibri"/>
               </a:rPr>
               <a:t>MACHINE • DISTRO • IMAGE</a:t>
@@ -7429,7 +7714,7 @@
         <p:spPr>
           <a:xfrm>
             <a:off x="822960" y="1417320"/>
-            <a:ext cx="10515600" cy="365760"/>
+            <a:ext cx="10515600" cy="338554"/>
           </a:xfrm>
           <a:prstGeom prst="rect">
             <a:avLst/>
@@ -7444,7 +7729,7 @@
           <a:p>
             <a:pPr algn="l"/>
             <a:r>
-              <a:rPr sz="1500" b="0">
+              <a:rPr sz="1600" b="0">
                 <a:solidFill>
                   <a:srgbClr val="666666"/>
                 </a:solidFill>
@@ -7575,7 +7860,7 @@
         <p:spPr>
           <a:xfrm>
             <a:off x="731519" y="2606039"/>
-            <a:ext cx="3337560" cy="3200400"/>
+            <a:ext cx="3337560" cy="3282950"/>
           </a:xfrm>
           <a:prstGeom prst="rect">
             <a:avLst/>
@@ -7594,14 +7879,29 @@
               </a:spcAft>
             </a:pPr>
             <a:r>
-              <a:rPr sz="1200" b="1">
+              <a:rPr sz="1600" b="1" dirty="0">
                 <a:solidFill>
                   <a:srgbClr val="CC0066"/>
                 </a:solidFill>
                 <a:latin typeface="Calibri"/>
               </a:rPr>
-              <a:t>Set in local.conf</a:t>
-            </a:r>
+              <a:t>Set in </a:t>
+            </a:r>
+            <a:r>
+              <a:rPr sz="1600" b="1" dirty="0" err="1">
+                <a:solidFill>
+                  <a:srgbClr val="CC0066"/>
+                </a:solidFill>
+                <a:latin typeface="Calibri"/>
+              </a:rPr>
+              <a:t>local.conf</a:t>
+            </a:r>
+            <a:endParaRPr sz="1600" b="1" dirty="0">
+              <a:solidFill>
+                <a:srgbClr val="CC0066"/>
+              </a:solidFill>
+              <a:latin typeface="Calibri"/>
+            </a:endParaRPr>
           </a:p>
           <a:p>
             <a:pPr>
@@ -7610,7 +7910,7 @@
               </a:spcAft>
             </a:pPr>
             <a:r>
-              <a:rPr sz="1000" b="0">
+              <a:rPr sz="1100" b="0" dirty="0">
                 <a:solidFill>
                   <a:srgbClr val="663399"/>
                 </a:solidFill>
@@ -7625,7 +7925,7 @@
                 <a:spcPts val="400"/>
               </a:spcAft>
             </a:pPr>
-            <a:endParaRPr sz="1000" b="0">
+            <a:endParaRPr sz="1100" b="0" dirty="0">
               <a:solidFill>
                 <a:srgbClr val="663399"/>
               </a:solidFill>
@@ -7639,7 +7939,7 @@
               </a:spcAft>
             </a:pPr>
             <a:r>
-              <a:rPr sz="1200" b="1">
+              <a:rPr sz="1600" b="1" dirty="0">
                 <a:solidFill>
                   <a:srgbClr val="CC0066"/>
                 </a:solidFill>
@@ -7655,7 +7955,7 @@
               </a:spcAft>
             </a:pPr>
             <a:r>
-              <a:rPr sz="1100" b="0">
+              <a:rPr sz="1400" b="0" dirty="0">
                 <a:solidFill>
                   <a:srgbClr val="333333"/>
                 </a:solidFill>
@@ -7671,7 +7971,7 @@
               </a:spcAft>
             </a:pPr>
             <a:r>
-              <a:rPr sz="1100" b="0">
+              <a:rPr sz="1400" b="0" dirty="0">
                 <a:solidFill>
                   <a:srgbClr val="333333"/>
                 </a:solidFill>
@@ -7687,38 +7987,24 @@
               </a:spcAft>
             </a:pPr>
             <a:r>
-              <a:rPr sz="1100" b="0">
-                <a:solidFill>
-                  <a:srgbClr val="333333"/>
-                </a:solidFill>
-                <a:latin typeface="Calibri"/>
-              </a:rPr>
-              <a:t>• beaglebone-yocto</a:t>
-            </a:r>
-          </a:p>
-          <a:p>
-            <a:pPr>
-              <a:spcAft>
-                <a:spcPts val="400"/>
-              </a:spcAft>
-            </a:pPr>
-            <a:r>
-              <a:rPr sz="1100" b="0">
-                <a:solidFill>
-                  <a:srgbClr val="333333"/>
-                </a:solidFill>
-                <a:latin typeface="Calibri"/>
-              </a:rPr>
-              <a:t>• imx8mp-evk</a:t>
-            </a:r>
-          </a:p>
-          <a:p>
-            <a:pPr>
-              <a:spcAft>
-                <a:spcPts val="400"/>
-              </a:spcAft>
-            </a:pPr>
-            <a:endParaRPr sz="1100" b="0">
+              <a:rPr sz="1400" b="0" dirty="0">
+                <a:solidFill>
+                  <a:srgbClr val="333333"/>
+                </a:solidFill>
+                <a:latin typeface="Calibri"/>
+              </a:rPr>
+              <a:t>• </a:t>
+            </a:r>
+            <a:r>
+              <a:rPr sz="1400" b="0" dirty="0" err="1">
+                <a:solidFill>
+                  <a:srgbClr val="333333"/>
+                </a:solidFill>
+                <a:latin typeface="Calibri"/>
+              </a:rPr>
+              <a:t>beaglebone-yocto</a:t>
+            </a:r>
+            <a:endParaRPr sz="1400" b="0" dirty="0">
               <a:solidFill>
                 <a:srgbClr val="333333"/>
               </a:solidFill>
@@ -7732,7 +8018,36 @@
               </a:spcAft>
             </a:pPr>
             <a:r>
-              <a:rPr sz="1200" b="1">
+              <a:rPr sz="1400" b="0" dirty="0">
+                <a:solidFill>
+                  <a:srgbClr val="333333"/>
+                </a:solidFill>
+                <a:latin typeface="Calibri"/>
+              </a:rPr>
+              <a:t>• imx8mp-evk</a:t>
+            </a:r>
+          </a:p>
+          <a:p>
+            <a:pPr>
+              <a:spcAft>
+                <a:spcPts val="400"/>
+              </a:spcAft>
+            </a:pPr>
+            <a:endParaRPr sz="1400" b="0" dirty="0">
+              <a:solidFill>
+                <a:srgbClr val="333333"/>
+              </a:solidFill>
+              <a:latin typeface="Calibri"/>
+            </a:endParaRPr>
+          </a:p>
+          <a:p>
+            <a:pPr>
+              <a:spcAft>
+                <a:spcPts val="400"/>
+              </a:spcAft>
+            </a:pPr>
+            <a:r>
+              <a:rPr sz="1600" b="1" dirty="0">
                 <a:solidFill>
                   <a:srgbClr val="CC0066"/>
                 </a:solidFill>
@@ -7748,13 +8063,31 @@
               </a:spcAft>
             </a:pPr>
             <a:r>
-              <a:rPr sz="1100" b="0">
-                <a:solidFill>
-                  <a:srgbClr val="333333"/>
-                </a:solidFill>
-                <a:latin typeface="Calibri"/>
-              </a:rPr>
-              <a:t>Defines CPU arch, boot params, storage layout, devicetree.</a:t>
+              <a:rPr sz="1400" b="0" dirty="0">
+                <a:solidFill>
+                  <a:srgbClr val="333333"/>
+                </a:solidFill>
+                <a:latin typeface="Calibri"/>
+              </a:rPr>
+              <a:t>Defines CPU arch, boot params, storage layout, </a:t>
+            </a:r>
+            <a:r>
+              <a:rPr sz="1400" b="0" dirty="0" err="1">
+                <a:solidFill>
+                  <a:srgbClr val="333333"/>
+                </a:solidFill>
+                <a:latin typeface="Calibri"/>
+              </a:rPr>
+              <a:t>devicetree</a:t>
+            </a:r>
+            <a:r>
+              <a:rPr sz="1400" b="0" dirty="0">
+                <a:solidFill>
+                  <a:srgbClr val="333333"/>
+                </a:solidFill>
+                <a:latin typeface="Calibri"/>
+              </a:rPr>
+              <a:t>.</a:t>
             </a:r>
           </a:p>
         </p:txBody>
@@ -7879,7 +8212,7 @@
         <p:spPr>
           <a:xfrm>
             <a:off x="4389120" y="2606039"/>
-            <a:ext cx="3337560" cy="3200400"/>
+            <a:ext cx="3337560" cy="3016210"/>
           </a:xfrm>
           <a:prstGeom prst="rect">
             <a:avLst/>
@@ -7898,14 +8231,29 @@
               </a:spcAft>
             </a:pPr>
             <a:r>
-              <a:rPr sz="1200" b="1">
+              <a:rPr sz="1600" b="1" dirty="0">
                 <a:solidFill>
                   <a:srgbClr val="663399"/>
                 </a:solidFill>
                 <a:latin typeface="Calibri"/>
               </a:rPr>
-              <a:t>Set in local.conf</a:t>
-            </a:r>
+              <a:t>Set in </a:t>
+            </a:r>
+            <a:r>
+              <a:rPr sz="1600" b="1" dirty="0" err="1">
+                <a:solidFill>
+                  <a:srgbClr val="663399"/>
+                </a:solidFill>
+                <a:latin typeface="Calibri"/>
+              </a:rPr>
+              <a:t>local.conf</a:t>
+            </a:r>
+            <a:endParaRPr sz="1600" b="1" dirty="0">
+              <a:solidFill>
+                <a:srgbClr val="663399"/>
+              </a:solidFill>
+              <a:latin typeface="Calibri"/>
+            </a:endParaRPr>
           </a:p>
           <a:p>
             <a:pPr>
@@ -7914,7 +8262,7 @@
               </a:spcAft>
             </a:pPr>
             <a:r>
-              <a:rPr sz="1000" b="0">
+              <a:rPr sz="1100" b="0" dirty="0">
                 <a:solidFill>
                   <a:srgbClr val="663399"/>
                 </a:solidFill>
@@ -7929,7 +8277,7 @@
                 <a:spcPts val="400"/>
               </a:spcAft>
             </a:pPr>
-            <a:endParaRPr sz="1000" b="0">
+            <a:endParaRPr sz="1100" b="0" dirty="0">
               <a:solidFill>
                 <a:srgbClr val="663399"/>
               </a:solidFill>
@@ -7943,7 +8291,7 @@
               </a:spcAft>
             </a:pPr>
             <a:r>
-              <a:rPr sz="1200" b="1">
+              <a:rPr sz="1600" b="1" dirty="0">
                 <a:solidFill>
                   <a:srgbClr val="663399"/>
                 </a:solidFill>
@@ -7959,7 +8307,7 @@
               </a:spcAft>
             </a:pPr>
             <a:r>
-              <a:rPr sz="1100" b="0">
+              <a:rPr sz="1400" b="0" dirty="0">
                 <a:solidFill>
                   <a:srgbClr val="333333"/>
                 </a:solidFill>
@@ -7975,7 +8323,7 @@
               </a:spcAft>
             </a:pPr>
             <a:r>
-              <a:rPr sz="1100" b="0">
+              <a:rPr sz="1400" b="0" dirty="0">
                 <a:solidFill>
                   <a:srgbClr val="333333"/>
                 </a:solidFill>
@@ -7991,13 +8339,31 @@
               </a:spcAft>
             </a:pPr>
             <a:r>
-              <a:rPr sz="1100" b="0">
-                <a:solidFill>
-                  <a:srgbClr val="333333"/>
-                </a:solidFill>
-                <a:latin typeface="Calibri"/>
-              </a:rPr>
-              <a:t>• yourcompany-distro</a:t>
+              <a:rPr sz="1400" b="0" dirty="0">
+                <a:solidFill>
+                  <a:srgbClr val="333333"/>
+                </a:solidFill>
+                <a:latin typeface="Calibri"/>
+              </a:rPr>
+              <a:t>• </a:t>
+            </a:r>
+            <a:r>
+              <a:rPr sz="1400" b="0" dirty="0" err="1">
+                <a:solidFill>
+                  <a:srgbClr val="333333"/>
+                </a:solidFill>
+                <a:latin typeface="Calibri"/>
+              </a:rPr>
+              <a:t>yourcompany</a:t>
+            </a:r>
+            <a:r>
+              <a:rPr sz="1400" b="0" dirty="0">
+                <a:solidFill>
+                  <a:srgbClr val="333333"/>
+                </a:solidFill>
+                <a:latin typeface="Calibri"/>
+              </a:rPr>
+              <a:t>-distro</a:t>
             </a:r>
           </a:p>
           <a:p>
@@ -8006,7 +8372,7 @@
                 <a:spcPts val="400"/>
               </a:spcAft>
             </a:pPr>
-            <a:endParaRPr sz="1100" b="0">
+            <a:endParaRPr sz="1400" b="0" dirty="0">
               <a:solidFill>
                 <a:srgbClr val="333333"/>
               </a:solidFill>
@@ -8020,7 +8386,7 @@
               </a:spcAft>
             </a:pPr>
             <a:r>
-              <a:rPr sz="1200" b="1">
+              <a:rPr sz="1600" b="1" dirty="0">
                 <a:solidFill>
                   <a:srgbClr val="663399"/>
                 </a:solidFill>
@@ -8036,13 +8402,49 @@
               </a:spcAft>
             </a:pPr>
             <a:r>
-              <a:rPr sz="1100" b="0">
-                <a:solidFill>
-                  <a:srgbClr val="333333"/>
-                </a:solidFill>
-                <a:latin typeface="Calibri"/>
-              </a:rPr>
-              <a:t>Defines init system, libc choice, package manager defaults, features.</a:t>
+              <a:rPr sz="1400" b="0" dirty="0">
+                <a:solidFill>
+                  <a:srgbClr val="333333"/>
+                </a:solidFill>
+                <a:latin typeface="Calibri"/>
+              </a:rPr>
+              <a:t>Defines </a:t>
+            </a:r>
+            <a:r>
+              <a:rPr sz="1400" b="0" dirty="0" err="1">
+                <a:solidFill>
+                  <a:srgbClr val="333333"/>
+                </a:solidFill>
+                <a:latin typeface="Calibri"/>
+              </a:rPr>
+              <a:t>init</a:t>
+            </a:r>
+            <a:r>
+              <a:rPr sz="1400" b="0" dirty="0">
+                <a:solidFill>
+                  <a:srgbClr val="333333"/>
+                </a:solidFill>
+                <a:latin typeface="Calibri"/>
+              </a:rPr>
+              <a:t> system, </a:t>
+            </a:r>
+            <a:r>
+              <a:rPr sz="1400" b="0" dirty="0" err="1">
+                <a:solidFill>
+                  <a:srgbClr val="333333"/>
+                </a:solidFill>
+                <a:latin typeface="Calibri"/>
+              </a:rPr>
+              <a:t>libc</a:t>
+            </a:r>
+            <a:r>
+              <a:rPr sz="1400" b="0" dirty="0">
+                <a:solidFill>
+                  <a:srgbClr val="333333"/>
+                </a:solidFill>
+                <a:latin typeface="Calibri"/>
+              </a:rPr>
+              <a:t> choice, package manager defaults, features.</a:t>
             </a:r>
           </a:p>
         </p:txBody>
@@ -8167,7 +8569,7 @@
         <p:spPr>
           <a:xfrm>
             <a:off x="8046719" y="2606039"/>
-            <a:ext cx="3337560" cy="3200400"/>
+            <a:ext cx="3337560" cy="3190617"/>
           </a:xfrm>
           <a:prstGeom prst="rect">
             <a:avLst/>
@@ -8186,7 +8588,7 @@
               </a:spcAft>
             </a:pPr>
             <a:r>
-              <a:rPr sz="1200" b="1">
+              <a:rPr sz="1600" b="1">
                 <a:solidFill>
                   <a:srgbClr val="CC0066"/>
                 </a:solidFill>
@@ -8202,7 +8604,7 @@
               </a:spcAft>
             </a:pPr>
             <a:r>
-              <a:rPr sz="1000" b="0">
+              <a:rPr sz="1100" b="0">
                 <a:solidFill>
                   <a:srgbClr val="663399"/>
                 </a:solidFill>
@@ -8217,7 +8619,7 @@
                 <a:spcPts val="400"/>
               </a:spcAft>
             </a:pPr>
-            <a:endParaRPr sz="1000" b="0">
+            <a:endParaRPr sz="1100" b="0">
               <a:solidFill>
                 <a:srgbClr val="663399"/>
               </a:solidFill>
@@ -8231,7 +8633,7 @@
               </a:spcAft>
             </a:pPr>
             <a:r>
-              <a:rPr sz="1200" b="1">
+              <a:rPr sz="1600" b="1">
                 <a:solidFill>
                   <a:srgbClr val="CC0066"/>
                 </a:solidFill>
@@ -8247,7 +8649,7 @@
               </a:spcAft>
             </a:pPr>
             <a:r>
-              <a:rPr sz="1100" b="0">
+              <a:rPr sz="1400" b="0">
                 <a:solidFill>
                   <a:srgbClr val="333333"/>
                 </a:solidFill>
@@ -8263,7 +8665,7 @@
               </a:spcAft>
             </a:pPr>
             <a:r>
-              <a:rPr sz="1100" b="0">
+              <a:rPr sz="1400" b="0">
                 <a:solidFill>
                   <a:srgbClr val="333333"/>
                 </a:solidFill>
@@ -8279,7 +8681,7 @@
               </a:spcAft>
             </a:pPr>
             <a:r>
-              <a:rPr sz="1100" b="0">
+              <a:rPr sz="1400" b="0">
                 <a:solidFill>
                   <a:srgbClr val="333333"/>
                 </a:solidFill>
@@ -8295,7 +8697,7 @@
               </a:spcAft>
             </a:pPr>
             <a:r>
-              <a:rPr sz="1100" b="0">
+              <a:rPr sz="1400" b="0">
                 <a:solidFill>
                   <a:srgbClr val="333333"/>
                 </a:solidFill>
@@ -8310,7 +8712,7 @@
                 <a:spcPts val="400"/>
               </a:spcAft>
             </a:pPr>
-            <a:endParaRPr sz="1100" b="0">
+            <a:endParaRPr sz="1400" b="0">
               <a:solidFill>
                 <a:srgbClr val="333333"/>
               </a:solidFill>
@@ -8324,7 +8726,7 @@
               </a:spcAft>
             </a:pPr>
             <a:r>
-              <a:rPr sz="1200" b="1">
+              <a:rPr sz="1600" b="1">
                 <a:solidFill>
                   <a:srgbClr val="CC0066"/>
                 </a:solidFill>
@@ -8340,7 +8742,7 @@
               </a:spcAft>
             </a:pPr>
             <a:r>
-              <a:rPr sz="1100" b="0">
+              <a:rPr sz="1400" b="0">
                 <a:solidFill>
                   <a:srgbClr val="333333"/>
                 </a:solidFill>
@@ -8360,7 +8762,7 @@
         <p:spPr>
           <a:xfrm>
             <a:off x="822960" y="5989320"/>
-            <a:ext cx="10561320" cy="365760"/>
+            <a:ext cx="10561320" cy="338554"/>
           </a:xfrm>
           <a:prstGeom prst="rect">
             <a:avLst/>
@@ -8375,7 +8777,7 @@
           <a:p>
             <a:pPr algn="l"/>
             <a:r>
-              <a:rPr sz="1300" b="1">
+              <a:rPr sz="1600" b="1">
                 <a:solidFill>
                   <a:srgbClr val="663399"/>
                 </a:solidFill>
@@ -8427,10 +8829,7 @@
           <a:lstStyle/>
           <a:p>
             <a:r>
-              <a:rPr sz="3200" b="1">
-                <a:solidFill>
-                  <a:srgbClr val="CC0066"/>
-                </a:solidFill>
+              <a:rPr sz="3200" b="1" dirty="0">
                 <a:latin typeface="Calibri"/>
               </a:rPr>
               <a:t>Putting It All Together</a:t>
@@ -8447,7 +8846,7 @@
         <p:spPr>
           <a:xfrm>
             <a:off x="822960" y="1417320"/>
-            <a:ext cx="10515600" cy="365760"/>
+            <a:ext cx="10515600" cy="369332"/>
           </a:xfrm>
           <a:prstGeom prst="rect">
             <a:avLst/>
@@ -8462,13 +8861,85 @@
           <a:p>
             <a:pPr algn="l"/>
             <a:r>
-              <a:rPr sz="1500" b="0">
+              <a:rPr sz="1600" b="0" dirty="0">
                 <a:solidFill>
                   <a:srgbClr val="666666"/>
                 </a:solidFill>
                 <a:latin typeface="Calibri"/>
               </a:rPr>
-              <a:t>From `bitbake your-image` to a bootable artifact — the journey.</a:t>
+              <a:t>From `</a:t>
+            </a:r>
+            <a:r>
+              <a:rPr sz="1600" b="0" dirty="0" err="1">
+                <a:solidFill>
+                  <a:srgbClr val="666666"/>
+                </a:solidFill>
+                <a:latin typeface="Calibri"/>
+              </a:rPr>
+              <a:t>bitbake</a:t>
+            </a:r>
+            <a:r>
+              <a:rPr sz="1600" b="0" dirty="0">
+                <a:solidFill>
+                  <a:srgbClr val="666666"/>
+                </a:solidFill>
+                <a:latin typeface="Calibri"/>
+              </a:rPr>
+              <a:t> your-image` to a </a:t>
+            </a:r>
+            <a:r>
+              <a:rPr b="0" dirty="0">
+                <a:solidFill>
+                  <a:srgbClr val="666666"/>
+                </a:solidFill>
+                <a:latin typeface="Calibri"/>
+              </a:rPr>
+              <a:t>bootable</a:t>
+            </a:r>
+            <a:r>
+              <a:rPr sz="1600" b="0" dirty="0">
+                <a:solidFill>
+                  <a:srgbClr val="666666"/>
+                </a:solidFill>
+                <a:latin typeface="Calibri"/>
+              </a:rPr>
+              <a:t> artifact </a:t>
+            </a:r>
+            <a:r>
+              <a:rPr lang="en-IN" sz="1600" b="0" dirty="0">
+                <a:solidFill>
+                  <a:srgbClr val="666666"/>
+                </a:solidFill>
+                <a:latin typeface="Calibri"/>
+              </a:rPr>
+              <a:t>:</a:t>
+            </a:r>
+            <a:r>
+              <a:rPr sz="1600" b="0" dirty="0">
+                <a:solidFill>
+                  <a:srgbClr val="666666"/>
+                </a:solidFill>
+                <a:latin typeface="Calibri"/>
+              </a:rPr>
+              <a:t> </a:t>
+            </a:r>
+            <a:r>
+              <a:rPr lang="en-IN" sz="1600" dirty="0">
+                <a:solidFill>
+                  <a:srgbClr val="666666"/>
+                </a:solidFill>
+                <a:latin typeface="Calibri"/>
+              </a:rPr>
+              <a:t>T</a:t>
+            </a:r>
+            <a:r>
+              <a:rPr sz="1600" b="0" dirty="0">
+                <a:solidFill>
+                  <a:srgbClr val="666666"/>
+                </a:solidFill>
+                <a:latin typeface="Calibri"/>
+              </a:rPr>
+              <a:t>he journey.</a:t>
             </a:r>
           </a:p>
         </p:txBody>
@@ -8534,8 +9005,8 @@
         </p:nvSpPr>
         <p:spPr>
           <a:xfrm>
-            <a:off x="1371600" y="1956816"/>
-            <a:ext cx="9966960" cy="457200"/>
+            <a:off x="1371600" y="1996491"/>
+            <a:ext cx="9966960" cy="338554"/>
           </a:xfrm>
           <a:prstGeom prst="rect">
             <a:avLst/>
@@ -8549,13 +9020,31 @@
           <a:lstStyle/>
           <a:p>
             <a:r>
-              <a:rPr sz="1400">
-                <a:solidFill>
-                  <a:srgbClr val="333333"/>
-                </a:solidFill>
-                <a:latin typeface="Calibri"/>
-              </a:rPr>
-              <a:t>You write/clone layers (vendor BSP, OE-Core, meta-yourproduct)</a:t>
+              <a:rPr sz="1600" dirty="0">
+                <a:solidFill>
+                  <a:srgbClr val="333333"/>
+                </a:solidFill>
+                <a:latin typeface="Calibri"/>
+              </a:rPr>
+              <a:t>You write/clone layers (vendor BSP, OE-Core, meta-</a:t>
+            </a:r>
+            <a:r>
+              <a:rPr sz="1600" dirty="0" err="1">
+                <a:solidFill>
+                  <a:srgbClr val="333333"/>
+                </a:solidFill>
+                <a:latin typeface="Calibri"/>
+              </a:rPr>
+              <a:t>yourproduct</a:t>
+            </a:r>
+            <a:r>
+              <a:rPr sz="1600" dirty="0">
+                <a:solidFill>
+                  <a:srgbClr val="333333"/>
+                </a:solidFill>
+                <a:latin typeface="Calibri"/>
+              </a:rPr>
+              <a:t>)</a:t>
             </a:r>
           </a:p>
         </p:txBody>
@@ -8621,8 +9110,8 @@
         </p:nvSpPr>
         <p:spPr>
           <a:xfrm>
-            <a:off x="1371600" y="2459736"/>
-            <a:ext cx="9966960" cy="457200"/>
+            <a:off x="1371600" y="2499411"/>
+            <a:ext cx="9966960" cy="338554"/>
           </a:xfrm>
           <a:prstGeom prst="rect">
             <a:avLst/>
@@ -8636,7 +9125,7 @@
           <a:lstStyle/>
           <a:p>
             <a:r>
-              <a:rPr sz="1400">
+              <a:rPr sz="1600">
                 <a:solidFill>
                   <a:srgbClr val="333333"/>
                 </a:solidFill>
@@ -8709,7 +9198,7 @@
         <p:spPr>
           <a:xfrm>
             <a:off x="1371600" y="2962656"/>
-            <a:ext cx="9966960" cy="457200"/>
+            <a:ext cx="9966960" cy="338554"/>
           </a:xfrm>
           <a:prstGeom prst="rect">
             <a:avLst/>
@@ -8723,7 +9212,7 @@
           <a:lstStyle/>
           <a:p>
             <a:r>
-              <a:rPr sz="1400">
+              <a:rPr sz="1600">
                 <a:solidFill>
                   <a:srgbClr val="333333"/>
                 </a:solidFill>
@@ -8796,7 +9285,7 @@
         <p:spPr>
           <a:xfrm>
             <a:off x="1371600" y="3465576"/>
-            <a:ext cx="9966960" cy="457200"/>
+            <a:ext cx="9966960" cy="338554"/>
           </a:xfrm>
           <a:prstGeom prst="rect">
             <a:avLst/>
@@ -8810,7 +9299,7 @@
           <a:lstStyle/>
           <a:p>
             <a:r>
-              <a:rPr sz="1400">
+              <a:rPr sz="1600">
                 <a:solidFill>
                   <a:srgbClr val="333333"/>
                 </a:solidFill>
@@ -8883,7 +9372,7 @@
         <p:spPr>
           <a:xfrm>
             <a:off x="1371600" y="3968496"/>
-            <a:ext cx="9966960" cy="457200"/>
+            <a:ext cx="9966960" cy="338554"/>
           </a:xfrm>
           <a:prstGeom prst="rect">
             <a:avLst/>
@@ -8897,7 +9386,7 @@
           <a:lstStyle/>
           <a:p>
             <a:r>
-              <a:rPr sz="1400">
+              <a:rPr sz="1600">
                 <a:solidFill>
                   <a:srgbClr val="333333"/>
                 </a:solidFill>
@@ -8970,7 +9459,7 @@
         <p:spPr>
           <a:xfrm>
             <a:off x="1371600" y="4471416"/>
-            <a:ext cx="9966960" cy="457200"/>
+            <a:ext cx="9966960" cy="338554"/>
           </a:xfrm>
           <a:prstGeom prst="rect">
             <a:avLst/>
@@ -8984,13 +9473,40 @@
           <a:lstStyle/>
           <a:p>
             <a:r>
-              <a:rPr sz="1400">
-                <a:solidFill>
-                  <a:srgbClr val="333333"/>
-                </a:solidFill>
-                <a:latin typeface="Calibri"/>
-              </a:rPr>
-              <a:t>sstate caches each task's output — speed compounds across builds</a:t>
+              <a:rPr sz="1600" dirty="0" err="1">
+                <a:solidFill>
+                  <a:srgbClr val="333333"/>
+                </a:solidFill>
+                <a:latin typeface="Calibri"/>
+              </a:rPr>
+              <a:t>sstate</a:t>
+            </a:r>
+            <a:r>
+              <a:rPr sz="1600" dirty="0">
+                <a:solidFill>
+                  <a:srgbClr val="333333"/>
+                </a:solidFill>
+                <a:latin typeface="Calibri"/>
+              </a:rPr>
+              <a:t> caches each task's output </a:t>
+            </a:r>
+            <a:r>
+              <a:rPr lang="en-IN" sz="1600" dirty="0">
+                <a:solidFill>
+                  <a:srgbClr val="333333"/>
+                </a:solidFill>
+                <a:latin typeface="Calibri"/>
+              </a:rPr>
+              <a:t>s</a:t>
+            </a:r>
+            <a:r>
+              <a:rPr sz="1600" dirty="0">
+                <a:solidFill>
+                  <a:srgbClr val="333333"/>
+                </a:solidFill>
+                <a:latin typeface="Calibri"/>
+              </a:rPr>
+              <a:t>peed compounds across builds</a:t>
             </a:r>
           </a:p>
         </p:txBody>
@@ -9057,7 +9573,7 @@
         <p:spPr>
           <a:xfrm>
             <a:off x="1371600" y="4974336"/>
-            <a:ext cx="9966960" cy="457200"/>
+            <a:ext cx="9966960" cy="338554"/>
           </a:xfrm>
           <a:prstGeom prst="rect">
             <a:avLst/>
@@ -9071,7 +9587,7 @@
           <a:lstStyle/>
           <a:p>
             <a:r>
-              <a:rPr sz="1400">
+              <a:rPr sz="1600">
                 <a:solidFill>
                   <a:srgbClr val="333333"/>
                 </a:solidFill>
@@ -9144,7 +9660,7 @@
         <p:spPr>
           <a:xfrm>
             <a:off x="1371600" y="5477256"/>
-            <a:ext cx="9966960" cy="457200"/>
+            <a:ext cx="9966960" cy="338554"/>
           </a:xfrm>
           <a:prstGeom prst="rect">
             <a:avLst/>
@@ -9158,14 +9674,47 @@
           <a:lstStyle/>
           <a:p>
             <a:r>
-              <a:rPr sz="1400">
-                <a:solidFill>
-                  <a:srgbClr val="333333"/>
-                </a:solidFill>
-                <a:latin typeface="Calibri"/>
-              </a:rPr>
-              <a:t>Artifact lands in tmp/deploy/images/${MACHINE}/  — bootable, flashable</a:t>
-            </a:r>
+              <a:rPr sz="1600" dirty="0">
+                <a:solidFill>
+                  <a:srgbClr val="333333"/>
+                </a:solidFill>
+                <a:latin typeface="Calibri"/>
+              </a:rPr>
+              <a:t>Artifact lands in </a:t>
+            </a:r>
+            <a:r>
+              <a:rPr sz="1600" dirty="0" err="1">
+                <a:solidFill>
+                  <a:srgbClr val="333333"/>
+                </a:solidFill>
+                <a:latin typeface="Calibri"/>
+              </a:rPr>
+              <a:t>tmp</a:t>
+            </a:r>
+            <a:r>
+              <a:rPr sz="1600" dirty="0">
+                <a:solidFill>
+                  <a:srgbClr val="333333"/>
+                </a:solidFill>
+                <a:latin typeface="Calibri"/>
+              </a:rPr>
+              <a:t>/deploy/images/${MACHINE}/  bootable, </a:t>
+            </a:r>
+            <a:r>
+              <a:rPr sz="1600" dirty="0" err="1">
+                <a:solidFill>
+                  <a:srgbClr val="333333"/>
+                </a:solidFill>
+                <a:latin typeface="Calibri"/>
+              </a:rPr>
+              <a:t>flashable</a:t>
+            </a:r>
+            <a:endParaRPr sz="1600" dirty="0">
+              <a:solidFill>
+                <a:srgbClr val="333333"/>
+              </a:solidFill>
+              <a:latin typeface="Calibri"/>
+            </a:endParaRPr>
           </a:p>
         </p:txBody>
       </p:sp>
@@ -9210,10 +9759,7 @@
           <a:lstStyle/>
           <a:p>
             <a:r>
-              <a:rPr sz="3200" b="1">
-                <a:solidFill>
-                  <a:srgbClr val="663399"/>
-                </a:solidFill>
+              <a:rPr sz="3200" b="1" dirty="0">
                 <a:latin typeface="Calibri"/>
               </a:rPr>
               <a:t>Session Summary</a:t>
@@ -9230,7 +9776,7 @@
         <p:spPr>
           <a:xfrm>
             <a:off x="822960" y="1417320"/>
-            <a:ext cx="10515600" cy="365760"/>
+            <a:ext cx="10515600" cy="338554"/>
           </a:xfrm>
           <a:prstGeom prst="rect">
             <a:avLst/>
@@ -9245,7 +9791,7 @@
           <a:p>
             <a:pPr algn="l"/>
             <a:r>
-              <a:rPr sz="1500" b="0">
+              <a:rPr sz="1600" b="0" dirty="0">
                 <a:solidFill>
                   <a:srgbClr val="666666"/>
                 </a:solidFill>
@@ -9318,7 +9864,7 @@
         <p:spPr>
           <a:xfrm>
             <a:off x="1417320" y="1874519"/>
-            <a:ext cx="10058400" cy="320040"/>
+            <a:ext cx="10058400" cy="400110"/>
           </a:xfrm>
           <a:prstGeom prst="rect">
             <a:avLst/>
@@ -9333,7 +9879,7 @@
           <a:p>
             <a:pPr algn="l"/>
             <a:r>
-              <a:rPr sz="1600" b="1">
+              <a:rPr sz="2000" b="1">
                 <a:solidFill>
                   <a:srgbClr val="663399"/>
                 </a:solidFill>
@@ -9353,7 +9899,7 @@
         <p:spPr>
           <a:xfrm>
             <a:off x="1417320" y="2185415"/>
-            <a:ext cx="10058400" cy="320040"/>
+            <a:ext cx="10058400" cy="338554"/>
           </a:xfrm>
           <a:prstGeom prst="rect">
             <a:avLst/>
@@ -9368,7 +9914,7 @@
           <a:p>
             <a:pPr algn="l"/>
             <a:r>
-              <a:rPr sz="1300" b="0">
+              <a:rPr sz="1600" b="0">
                 <a:solidFill>
                   <a:srgbClr val="333333"/>
                 </a:solidFill>
@@ -9441,7 +9987,7 @@
         <p:spPr>
           <a:xfrm>
             <a:off x="1417320" y="2587752"/>
-            <a:ext cx="10058400" cy="320040"/>
+            <a:ext cx="10058400" cy="400110"/>
           </a:xfrm>
           <a:prstGeom prst="rect">
             <a:avLst/>
@@ -9456,7 +10002,7 @@
           <a:p>
             <a:pPr algn="l"/>
             <a:r>
-              <a:rPr sz="1600" b="1">
+              <a:rPr sz="2000" b="1">
                 <a:solidFill>
                   <a:srgbClr val="663399"/>
                 </a:solidFill>
@@ -9476,7 +10022,7 @@
         <p:spPr>
           <a:xfrm>
             <a:off x="1417320" y="2898648"/>
-            <a:ext cx="10058400" cy="320040"/>
+            <a:ext cx="10058400" cy="338554"/>
           </a:xfrm>
           <a:prstGeom prst="rect">
             <a:avLst/>
@@ -9491,7 +10037,7 @@
           <a:p>
             <a:pPr algn="l"/>
             <a:r>
-              <a:rPr sz="1300" b="0">
+              <a:rPr sz="1600" b="0">
                 <a:solidFill>
                   <a:srgbClr val="333333"/>
                 </a:solidFill>
@@ -9564,7 +10110,7 @@
         <p:spPr>
           <a:xfrm>
             <a:off x="1417320" y="3300984"/>
-            <a:ext cx="10058400" cy="320040"/>
+            <a:ext cx="10058400" cy="400110"/>
           </a:xfrm>
           <a:prstGeom prst="rect">
             <a:avLst/>
@@ -9579,7 +10125,7 @@
           <a:p>
             <a:pPr algn="l"/>
             <a:r>
-              <a:rPr sz="1600" b="1">
+              <a:rPr sz="2000" b="1">
                 <a:solidFill>
                   <a:srgbClr val="663399"/>
                 </a:solidFill>
@@ -9599,7 +10145,7 @@
         <p:spPr>
           <a:xfrm>
             <a:off x="1417320" y="3611879"/>
-            <a:ext cx="10058400" cy="320040"/>
+            <a:ext cx="10058400" cy="338554"/>
           </a:xfrm>
           <a:prstGeom prst="rect">
             <a:avLst/>
@@ -9614,7 +10160,7 @@
           <a:p>
             <a:pPr algn="l"/>
             <a:r>
-              <a:rPr sz="1300" b="0">
+              <a:rPr sz="1600" b="0">
                 <a:solidFill>
                   <a:srgbClr val="333333"/>
                 </a:solidFill>
@@ -9687,7 +10233,7 @@
         <p:spPr>
           <a:xfrm>
             <a:off x="1417320" y="4014215"/>
-            <a:ext cx="10058400" cy="320040"/>
+            <a:ext cx="10058400" cy="400110"/>
           </a:xfrm>
           <a:prstGeom prst="rect">
             <a:avLst/>
@@ -9702,7 +10248,7 @@
           <a:p>
             <a:pPr algn="l"/>
             <a:r>
-              <a:rPr sz="1600" b="1">
+              <a:rPr sz="2000" b="1">
                 <a:solidFill>
                   <a:srgbClr val="663399"/>
                 </a:solidFill>
@@ -9722,7 +10268,7 @@
         <p:spPr>
           <a:xfrm>
             <a:off x="1417320" y="4325112"/>
-            <a:ext cx="10058400" cy="320040"/>
+            <a:ext cx="10058400" cy="338554"/>
           </a:xfrm>
           <a:prstGeom prst="rect">
             <a:avLst/>
@@ -9737,13 +10283,13 @@
           <a:p>
             <a:pPr algn="l"/>
             <a:r>
-              <a:rPr sz="1300" b="0">
-                <a:solidFill>
-                  <a:srgbClr val="333333"/>
-                </a:solidFill>
-                <a:latin typeface="Calibri"/>
-              </a:rPr>
-              <a:t>First build slow, every subsequent build fast — shared across team</a:t>
+              <a:rPr sz="1600" b="0" dirty="0">
+                <a:solidFill>
+                  <a:srgbClr val="333333"/>
+                </a:solidFill>
+                <a:latin typeface="Calibri"/>
+              </a:rPr>
+              <a:t>First build slow, every subsequent build fast shared across team</a:t>
             </a:r>
           </a:p>
         </p:txBody>
@@ -9810,7 +10356,7 @@
         <p:spPr>
           <a:xfrm>
             <a:off x="1417320" y="4727448"/>
-            <a:ext cx="10058400" cy="320040"/>
+            <a:ext cx="10058400" cy="400110"/>
           </a:xfrm>
           <a:prstGeom prst="rect">
             <a:avLst/>
@@ -9825,7 +10371,7 @@
           <a:p>
             <a:pPr algn="l"/>
             <a:r>
-              <a:rPr sz="1600" b="1">
+              <a:rPr sz="2000" b="1">
                 <a:solidFill>
                   <a:srgbClr val="663399"/>
                 </a:solidFill>
@@ -9845,7 +10391,7 @@
         <p:spPr>
           <a:xfrm>
             <a:off x="1417320" y="5038344"/>
-            <a:ext cx="10058400" cy="320040"/>
+            <a:ext cx="10058400" cy="338554"/>
           </a:xfrm>
           <a:prstGeom prst="rect">
             <a:avLst/>
@@ -9860,13 +10406,13 @@
           <a:p>
             <a:pPr algn="l"/>
             <a:r>
-              <a:rPr sz="1300" b="0">
-                <a:solidFill>
-                  <a:srgbClr val="333333"/>
-                </a:solidFill>
-                <a:latin typeface="Calibri"/>
-              </a:rPr>
-              <a:t>Hardware, policy, contents — independent and composable</a:t>
+              <a:rPr sz="1600" b="0" dirty="0">
+                <a:solidFill>
+                  <a:srgbClr val="333333"/>
+                </a:solidFill>
+                <a:latin typeface="Calibri"/>
+              </a:rPr>
+              <a:t>Hardware, policy, contents  independent and composable</a:t>
             </a:r>
           </a:p>
         </p:txBody>
@@ -9913,7 +10459,7 @@
           <a:p>
             <a:pPr algn="ctr"/>
             <a:r>
-              <a:rPr sz="1400" b="1">
+              <a:rPr b="1" dirty="0">
                 <a:solidFill>
                   <a:srgbClr val="663399"/>
                 </a:solidFill>
@@ -9922,13 +10468,22 @@
               <a:t>Next session  →  </a:t>
             </a:r>
             <a:r>
-              <a:rPr sz="1400">
-                <a:solidFill>
-                  <a:srgbClr val="333333"/>
-                </a:solidFill>
-                <a:latin typeface="Calibri"/>
-              </a:rPr>
-              <a:t>BitBake Deep Dive (75 min)  — Tasks, execution flow, variables, overrides</a:t>
+              <a:rPr dirty="0" err="1">
+                <a:solidFill>
+                  <a:srgbClr val="333333"/>
+                </a:solidFill>
+                <a:latin typeface="Calibri"/>
+              </a:rPr>
+              <a:t>BitBake</a:t>
+            </a:r>
+            <a:r>
+              <a:rPr dirty="0">
+                <a:solidFill>
+                  <a:srgbClr val="333333"/>
+                </a:solidFill>
+                <a:latin typeface="Calibri"/>
+              </a:rPr>
+              <a:t> Deep Dive (75 min) Tasks, execution flow, variables, overrides</a:t>
             </a:r>
           </a:p>
         </p:txBody>
@@ -9974,10 +10529,7 @@
           <a:lstStyle/>
           <a:p>
             <a:r>
-              <a:rPr sz="3200" b="1">
-                <a:solidFill>
-                  <a:srgbClr val="CC0066"/>
-                </a:solidFill>
+              <a:rPr sz="3200" b="1" dirty="0">
                 <a:latin typeface="Calibri"/>
               </a:rPr>
               <a:t>Session Agenda</a:t>
@@ -9994,7 +10546,7 @@
         <p:spPr>
           <a:xfrm>
             <a:off x="822960" y="1554480"/>
-            <a:ext cx="10515600" cy="4572000"/>
+            <a:ext cx="10515600" cy="3549690"/>
           </a:xfrm>
           <a:prstGeom prst="rect">
             <a:avLst/>
@@ -10013,13 +10565,49 @@
               </a:spcAft>
             </a:pPr>
             <a:r>
-              <a:rPr sz="2200" b="0">
-                <a:solidFill>
-                  <a:srgbClr val="333333"/>
-                </a:solidFill>
-                <a:latin typeface="Calibri"/>
-              </a:rPr>
-              <a:t>1.  Why Yocto exists — the problem it solves</a:t>
+              <a:rPr sz="2200" b="0" dirty="0">
+                <a:solidFill>
+                  <a:srgbClr val="333333"/>
+                </a:solidFill>
+                <a:latin typeface="Calibri"/>
+              </a:rPr>
+              <a:t>1.  Why </a:t>
+            </a:r>
+            <a:r>
+              <a:rPr sz="2200" b="0" dirty="0" err="1">
+                <a:solidFill>
+                  <a:srgbClr val="333333"/>
+                </a:solidFill>
+                <a:latin typeface="Calibri"/>
+              </a:rPr>
+              <a:t>Yocto</a:t>
+            </a:r>
+            <a:r>
+              <a:rPr sz="2200" b="0" dirty="0">
+                <a:solidFill>
+                  <a:srgbClr val="333333"/>
+                </a:solidFill>
+                <a:latin typeface="Calibri"/>
+              </a:rPr>
+              <a:t> exists </a:t>
+            </a:r>
+            <a:r>
+              <a:rPr lang="en-IN" sz="2200" b="0" dirty="0">
+                <a:solidFill>
+                  <a:srgbClr val="333333"/>
+                </a:solidFill>
+                <a:latin typeface="Calibri"/>
+              </a:rPr>
+              <a:t>:</a:t>
+            </a:r>
+            <a:r>
+              <a:rPr sz="2200" b="0" dirty="0">
+                <a:solidFill>
+                  <a:srgbClr val="333333"/>
+                </a:solidFill>
+                <a:latin typeface="Calibri"/>
+              </a:rPr>
+              <a:t> the problem it solves</a:t>
             </a:r>
           </a:p>
           <a:p>
@@ -10029,13 +10617,31 @@
               </a:spcAft>
             </a:pPr>
             <a:r>
-              <a:rPr sz="2200" b="0">
-                <a:solidFill>
-                  <a:srgbClr val="333333"/>
-                </a:solidFill>
-                <a:latin typeface="Calibri"/>
-              </a:rPr>
-              <a:t>2.  The Yocto Project ecosystem</a:t>
+              <a:rPr sz="2200" b="0" dirty="0">
+                <a:solidFill>
+                  <a:srgbClr val="333333"/>
+                </a:solidFill>
+                <a:latin typeface="Calibri"/>
+              </a:rPr>
+              <a:t>2.  The </a:t>
+            </a:r>
+            <a:r>
+              <a:rPr sz="2200" b="0" dirty="0" err="1">
+                <a:solidFill>
+                  <a:srgbClr val="333333"/>
+                </a:solidFill>
+                <a:latin typeface="Calibri"/>
+              </a:rPr>
+              <a:t>Yocto</a:t>
+            </a:r>
+            <a:r>
+              <a:rPr sz="2200" b="0" dirty="0">
+                <a:solidFill>
+                  <a:srgbClr val="333333"/>
+                </a:solidFill>
+                <a:latin typeface="Calibri"/>
+              </a:rPr>
+              <a:t> Project ecosystem</a:t>
             </a:r>
           </a:p>
           <a:p>
@@ -10045,13 +10651,31 @@
               </a:spcAft>
             </a:pPr>
             <a:r>
-              <a:rPr sz="2200" b="0">
-                <a:solidFill>
-                  <a:srgbClr val="333333"/>
-                </a:solidFill>
-                <a:latin typeface="Calibri"/>
-              </a:rPr>
-              <a:t>3.  Poky &amp; OpenEmbedded-Core</a:t>
+              <a:rPr sz="2200" b="0" dirty="0">
+                <a:solidFill>
+                  <a:srgbClr val="333333"/>
+                </a:solidFill>
+                <a:latin typeface="Calibri"/>
+              </a:rPr>
+              <a:t>3.  Poky &amp; </a:t>
+            </a:r>
+            <a:r>
+              <a:rPr sz="2200" b="0" dirty="0" err="1">
+                <a:solidFill>
+                  <a:srgbClr val="333333"/>
+                </a:solidFill>
+                <a:latin typeface="Calibri"/>
+              </a:rPr>
+              <a:t>OpenEmbedded</a:t>
+            </a:r>
+            <a:r>
+              <a:rPr sz="2200" b="0" dirty="0">
+                <a:solidFill>
+                  <a:srgbClr val="333333"/>
+                </a:solidFill>
+                <a:latin typeface="Calibri"/>
+              </a:rPr>
+              <a:t>-Core</a:t>
             </a:r>
           </a:p>
           <a:p>
@@ -10061,13 +10685,49 @@
               </a:spcAft>
             </a:pPr>
             <a:r>
-              <a:rPr sz="2200" b="0">
-                <a:solidFill>
-                  <a:srgbClr val="333333"/>
-                </a:solidFill>
-                <a:latin typeface="Calibri"/>
-              </a:rPr>
-              <a:t>4.  BitBake — the build engine</a:t>
+              <a:rPr sz="2200" b="0" dirty="0">
+                <a:solidFill>
+                  <a:srgbClr val="333333"/>
+                </a:solidFill>
+                <a:latin typeface="Calibri"/>
+              </a:rPr>
+              <a:t>4.  </a:t>
+            </a:r>
+            <a:r>
+              <a:rPr sz="2200" b="0" dirty="0" err="1">
+                <a:solidFill>
+                  <a:srgbClr val="333333"/>
+                </a:solidFill>
+                <a:latin typeface="Calibri"/>
+              </a:rPr>
+              <a:t>BitBake</a:t>
+            </a:r>
+            <a:r>
+              <a:rPr sz="2200" b="0" dirty="0">
+                <a:solidFill>
+                  <a:srgbClr val="333333"/>
+                </a:solidFill>
+                <a:latin typeface="Calibri"/>
+              </a:rPr>
+              <a:t> </a:t>
+            </a:r>
+            <a:r>
+              <a:rPr lang="en-IN" sz="2200" b="0" dirty="0">
+                <a:solidFill>
+                  <a:srgbClr val="333333"/>
+                </a:solidFill>
+                <a:latin typeface="Calibri"/>
+              </a:rPr>
+              <a:t>:</a:t>
+            </a:r>
+            <a:r>
+              <a:rPr sz="2200" b="0" dirty="0">
+                <a:solidFill>
+                  <a:srgbClr val="333333"/>
+                </a:solidFill>
+                <a:latin typeface="Calibri"/>
+              </a:rPr>
+              <a:t> the build engine</a:t>
             </a:r>
           </a:p>
           <a:p>
@@ -10077,7 +10737,7 @@
               </a:spcAft>
             </a:pPr>
             <a:r>
-              <a:rPr sz="2200" b="0">
+              <a:rPr sz="2200" b="0" dirty="0">
                 <a:solidFill>
                   <a:srgbClr val="333333"/>
                 </a:solidFill>
@@ -10093,7 +10753,7 @@
               </a:spcAft>
             </a:pPr>
             <a:r>
-              <a:rPr sz="2200" b="0">
+              <a:rPr sz="2200" b="0" dirty="0">
                 <a:solidFill>
                   <a:srgbClr val="333333"/>
                 </a:solidFill>
@@ -10109,13 +10769,31 @@
               </a:spcAft>
             </a:pPr>
             <a:r>
-              <a:rPr sz="2200" b="0">
-                <a:solidFill>
-                  <a:srgbClr val="333333"/>
-                </a:solidFill>
-                <a:latin typeface="Calibri"/>
-              </a:rPr>
-              <a:t>7.  Dependencies &amp; sstate cache</a:t>
+              <a:rPr sz="2200" b="0" dirty="0">
+                <a:solidFill>
+                  <a:srgbClr val="333333"/>
+                </a:solidFill>
+                <a:latin typeface="Calibri"/>
+              </a:rPr>
+              <a:t>7.  Dependencies &amp; </a:t>
+            </a:r>
+            <a:r>
+              <a:rPr sz="2200" b="0" dirty="0" err="1">
+                <a:solidFill>
+                  <a:srgbClr val="333333"/>
+                </a:solidFill>
+                <a:latin typeface="Calibri"/>
+              </a:rPr>
+              <a:t>sstate</a:t>
+            </a:r>
+            <a:r>
+              <a:rPr sz="2200" b="0" dirty="0">
+                <a:solidFill>
+                  <a:srgbClr val="333333"/>
+                </a:solidFill>
+                <a:latin typeface="Calibri"/>
+              </a:rPr>
+              <a:t> cache</a:t>
             </a:r>
           </a:p>
           <a:p>
@@ -10125,7 +10803,7 @@
               </a:spcAft>
             </a:pPr>
             <a:r>
-              <a:rPr sz="2200" b="0">
+              <a:rPr sz="2200" b="0" dirty="0">
                 <a:solidFill>
                   <a:srgbClr val="333333"/>
                 </a:solidFill>
@@ -10141,7 +10819,7 @@
               </a:spcAft>
             </a:pPr>
             <a:r>
-              <a:rPr sz="2200" b="0">
+              <a:rPr sz="2200" b="0" dirty="0">
                 <a:solidFill>
                   <a:srgbClr val="333333"/>
                 </a:solidFill>
@@ -10193,33 +10871,23 @@
           <a:lstStyle/>
           <a:p>
             <a:r>
-              <a:rPr sz="3200" b="1">
-                <a:solidFill>
-                  <a:srgbClr val="CC0066"/>
-                </a:solidFill>
-                <a:latin typeface="Calibri"/>
-              </a:rPr>
-              <a:t>Why Yocto Exists</a:t>
-            </a:r>
-          </a:p>
-        </p:txBody>
-      </p:sp>
-      <p:sp>
-        <p:nvSpPr>
-          <p:cNvPr id="3" name="Content Placeholder 2"/>
-          <p:cNvSpPr>
-            <a:spLocks noGrp="1"/>
-          </p:cNvSpPr>
-          <p:nvPr>
-            <p:ph idx="1"/>
-          </p:nvPr>
-        </p:nvSpPr>
-        <p:spPr/>
-        <p:txBody>
-          <a:bodyPr/>
-          <a:lstStyle/>
-          <a:p>
-            <a:endParaRPr/>
+              <a:rPr sz="3200" b="1" dirty="0">
+                <a:latin typeface="Calibri"/>
+              </a:rPr>
+              <a:t>Why </a:t>
+            </a:r>
+            <a:r>
+              <a:rPr sz="3200" b="1" dirty="0" err="1">
+                <a:latin typeface="Calibri"/>
+              </a:rPr>
+              <a:t>Yocto</a:t>
+            </a:r>
+            <a:r>
+              <a:rPr sz="3200" b="1" dirty="0">
+                <a:latin typeface="Calibri"/>
+              </a:rPr>
+              <a:t> Exists</a:t>
+            </a:r>
           </a:p>
         </p:txBody>
       </p:sp>
@@ -10267,7 +10935,7 @@
         <p:spPr>
           <a:xfrm>
             <a:off x="822960" y="2057400"/>
-            <a:ext cx="5120640" cy="3657600"/>
+            <a:ext cx="5120640" cy="1528624"/>
           </a:xfrm>
           <a:prstGeom prst="rect">
             <a:avLst/>
@@ -10286,14 +10954,29 @@
               </a:spcAft>
             </a:pPr>
             <a:r>
-              <a:rPr sz="1500" b="0">
-                <a:solidFill>
-                  <a:srgbClr val="333333"/>
-                </a:solidFill>
-                <a:latin typeface="Calibri"/>
-              </a:rPr>
-              <a:t>• Every vendor maintains a custom rootfs</a:t>
-            </a:r>
+              <a:rPr sz="1600" b="0" dirty="0">
+                <a:solidFill>
+                  <a:srgbClr val="333333"/>
+                </a:solidFill>
+                <a:latin typeface="Calibri"/>
+              </a:rPr>
+              <a:t>• Every vendor maintains a custom </a:t>
+            </a:r>
+            <a:r>
+              <a:rPr sz="1600" b="0" dirty="0" err="1">
+                <a:solidFill>
+                  <a:srgbClr val="333333"/>
+                </a:solidFill>
+                <a:latin typeface="Calibri"/>
+              </a:rPr>
+              <a:t>rootfs</a:t>
+            </a:r>
+            <a:endParaRPr sz="1600" b="0" dirty="0">
+              <a:solidFill>
+                <a:srgbClr val="333333"/>
+              </a:solidFill>
+              <a:latin typeface="Calibri"/>
+            </a:endParaRPr>
           </a:p>
           <a:p>
             <a:pPr>
@@ -10302,7 +10985,7 @@
               </a:spcAft>
             </a:pPr>
             <a:r>
-              <a:rPr sz="1500" b="0">
+              <a:rPr sz="1600" b="0" dirty="0">
                 <a:solidFill>
                   <a:srgbClr val="333333"/>
                 </a:solidFill>
@@ -10318,7 +11001,7 @@
               </a:spcAft>
             </a:pPr>
             <a:r>
-              <a:rPr sz="1500" b="0">
+              <a:rPr sz="1600" b="0" dirty="0">
                 <a:solidFill>
                   <a:srgbClr val="333333"/>
                 </a:solidFill>
@@ -10334,13 +11017,31 @@
               </a:spcAft>
             </a:pPr>
             <a:r>
-              <a:rPr sz="1500" b="0">
-                <a:solidFill>
-                  <a:srgbClr val="333333"/>
-                </a:solidFill>
-                <a:latin typeface="Calibri"/>
-              </a:rPr>
-              <a:t>• "Works for this board" — porting is manual</a:t>
+              <a:rPr sz="1600" b="0" dirty="0">
+                <a:solidFill>
+                  <a:srgbClr val="333333"/>
+                </a:solidFill>
+                <a:latin typeface="Calibri"/>
+              </a:rPr>
+              <a:t>• "Works for this board" </a:t>
+            </a:r>
+            <a:r>
+              <a:rPr lang="en-IN" sz="1600" b="0" dirty="0">
+                <a:solidFill>
+                  <a:srgbClr val="333333"/>
+                </a:solidFill>
+                <a:latin typeface="Calibri"/>
+              </a:rPr>
+              <a:t>-</a:t>
+            </a:r>
+            <a:r>
+              <a:rPr sz="1600" b="0" dirty="0">
+                <a:solidFill>
+                  <a:srgbClr val="333333"/>
+                </a:solidFill>
+                <a:latin typeface="Calibri"/>
+              </a:rPr>
+              <a:t> porting is manual</a:t>
             </a:r>
           </a:p>
           <a:p>
@@ -10350,7 +11051,7 @@
               </a:spcAft>
             </a:pPr>
             <a:r>
-              <a:rPr sz="1500" b="0">
+              <a:rPr sz="1600" b="0" dirty="0">
                 <a:solidFill>
                   <a:srgbClr val="333333"/>
                 </a:solidFill>
@@ -10405,7 +11106,7 @@
         <p:spPr>
           <a:xfrm>
             <a:off x="6263640" y="2057400"/>
-            <a:ext cx="5120640" cy="3657600"/>
+            <a:ext cx="5120640" cy="1528624"/>
           </a:xfrm>
           <a:prstGeom prst="rect">
             <a:avLst/>
@@ -10424,7 +11125,7 @@
               </a:spcAft>
             </a:pPr>
             <a:r>
-              <a:rPr sz="1500" b="0">
+              <a:rPr sz="1600" b="0" dirty="0">
                 <a:solidFill>
                   <a:srgbClr val="333333"/>
                 </a:solidFill>
@@ -10440,7 +11141,7 @@
               </a:spcAft>
             </a:pPr>
             <a:r>
-              <a:rPr sz="1500" b="0">
+              <a:rPr sz="1600" b="0" dirty="0">
                 <a:solidFill>
                   <a:srgbClr val="333333"/>
                 </a:solidFill>
@@ -10456,13 +11157,31 @@
               </a:spcAft>
             </a:pPr>
             <a:r>
-              <a:rPr sz="1500" b="0">
-                <a:solidFill>
-                  <a:srgbClr val="333333"/>
-                </a:solidFill>
-                <a:latin typeface="Calibri"/>
-              </a:rPr>
-              <a:t>• Reproducible builds — same input, same output</a:t>
+              <a:rPr sz="1600" b="0" dirty="0">
+                <a:solidFill>
+                  <a:srgbClr val="333333"/>
+                </a:solidFill>
+                <a:latin typeface="Calibri"/>
+              </a:rPr>
+              <a:t>• Reproducible builds </a:t>
+            </a:r>
+            <a:r>
+              <a:rPr lang="en-IN" sz="1600" b="0" dirty="0">
+                <a:solidFill>
+                  <a:srgbClr val="333333"/>
+                </a:solidFill>
+                <a:latin typeface="Calibri"/>
+              </a:rPr>
+              <a:t>:</a:t>
+            </a:r>
+            <a:r>
+              <a:rPr sz="1600" b="0" dirty="0">
+                <a:solidFill>
+                  <a:srgbClr val="333333"/>
+                </a:solidFill>
+                <a:latin typeface="Calibri"/>
+              </a:rPr>
+              <a:t> same input, same output</a:t>
             </a:r>
           </a:p>
           <a:p>
@@ -10472,7 +11191,7 @@
               </a:spcAft>
             </a:pPr>
             <a:r>
-              <a:rPr sz="1500" b="0">
+              <a:rPr sz="1600" b="0" dirty="0">
                 <a:solidFill>
                   <a:srgbClr val="333333"/>
                 </a:solidFill>
@@ -10488,7 +11207,7 @@
               </a:spcAft>
             </a:pPr>
             <a:r>
-              <a:rPr sz="1500" b="0">
+              <a:rPr sz="1600" b="0" dirty="0">
                 <a:solidFill>
                   <a:srgbClr val="333333"/>
                 </a:solidFill>
@@ -10541,13 +11260,31 @@
           <a:p>
             <a:pPr algn="l"/>
             <a:r>
-              <a:rPr sz="1500" b="1">
+              <a:rPr sz="1600" b="1" dirty="0">
                 <a:solidFill>
                   <a:srgbClr val="663399"/>
                 </a:solidFill>
                 <a:latin typeface="Calibri"/>
               </a:rPr>
-              <a:t>Bottom line: Yocto is a build framework, not a distro. You compose your distro from layers.</a:t>
+              <a:t>Bottom line: </a:t>
+            </a:r>
+            <a:r>
+              <a:rPr sz="1600" b="1" dirty="0" err="1">
+                <a:solidFill>
+                  <a:srgbClr val="663399"/>
+                </a:solidFill>
+                <a:latin typeface="Calibri"/>
+              </a:rPr>
+              <a:t>Yocto</a:t>
+            </a:r>
+            <a:r>
+              <a:rPr sz="1600" b="1" dirty="0">
+                <a:solidFill>
+                  <a:srgbClr val="663399"/>
+                </a:solidFill>
+                <a:latin typeface="Calibri"/>
+              </a:rPr>
+              <a:t> is a build framework, not a distro. You compose your distro from layers.</a:t>
             </a:r>
           </a:p>
         </p:txBody>
@@ -10593,13 +11330,22 @@
           <a:lstStyle/>
           <a:p>
             <a:r>
-              <a:rPr sz="3200" b="1">
-                <a:solidFill>
-                  <a:srgbClr val="CC0066"/>
-                </a:solidFill>
-                <a:latin typeface="Calibri"/>
-              </a:rPr>
-              <a:t>The Yocto Project Ecosystem</a:t>
+              <a:rPr sz="3200" b="1" dirty="0">
+                <a:latin typeface="Calibri"/>
+              </a:rPr>
+              <a:t>The </a:t>
+            </a:r>
+            <a:r>
+              <a:rPr sz="3200" b="1" dirty="0" err="1">
+                <a:latin typeface="Calibri"/>
+              </a:rPr>
+              <a:t>Yocto</a:t>
+            </a:r>
+            <a:r>
+              <a:rPr sz="3200" b="1" dirty="0">
+                <a:latin typeface="Calibri"/>
+              </a:rPr>
+              <a:t> Project Ecosystem</a:t>
             </a:r>
           </a:p>
         </p:txBody>
@@ -10613,7 +11359,7 @@
         <p:spPr>
           <a:xfrm>
             <a:off x="822960" y="1417320"/>
-            <a:ext cx="10515600" cy="457200"/>
+            <a:ext cx="10515600" cy="338554"/>
           </a:xfrm>
           <a:prstGeom prst="rect">
             <a:avLst/>
@@ -10628,13 +11374,49 @@
           <a:p>
             <a:pPr algn="l"/>
             <a:r>
-              <a:rPr sz="1400" b="0">
+              <a:rPr sz="1600" b="0" dirty="0">
                 <a:solidFill>
                   <a:srgbClr val="666666"/>
                 </a:solidFill>
                 <a:latin typeface="Calibri"/>
               </a:rPr>
-              <a:t>These four things work together. People say "Yocto" loosely — strictly, they are distinct.</a:t>
+              <a:t>These four things work together. People say "</a:t>
+            </a:r>
+            <a:r>
+              <a:rPr sz="1600" b="0" dirty="0" err="1">
+                <a:solidFill>
+                  <a:srgbClr val="666666"/>
+                </a:solidFill>
+                <a:latin typeface="Calibri"/>
+              </a:rPr>
+              <a:t>Yocto</a:t>
+            </a:r>
+            <a:r>
+              <a:rPr sz="1600" b="0" dirty="0">
+                <a:solidFill>
+                  <a:srgbClr val="666666"/>
+                </a:solidFill>
+                <a:latin typeface="Calibri"/>
+              </a:rPr>
+              <a:t>" loosely </a:t>
+            </a:r>
+            <a:r>
+              <a:rPr lang="en-IN" sz="1600" b="0" dirty="0">
+                <a:solidFill>
+                  <a:srgbClr val="666666"/>
+                </a:solidFill>
+                <a:latin typeface="Calibri"/>
+              </a:rPr>
+              <a:t>-</a:t>
+            </a:r>
+            <a:r>
+              <a:rPr sz="1600" b="0" dirty="0">
+                <a:solidFill>
+                  <a:srgbClr val="666666"/>
+                </a:solidFill>
+                <a:latin typeface="Calibri"/>
+              </a:rPr>
+              <a:t> strictly, they are distinct.</a:t>
             </a:r>
           </a:p>
         </p:txBody>
@@ -10774,7 +11556,7 @@
         <p:spPr>
           <a:xfrm>
             <a:off x="1097280" y="2514600"/>
-            <a:ext cx="4754879" cy="1280160"/>
+            <a:ext cx="4754879" cy="907941"/>
           </a:xfrm>
           <a:prstGeom prst="rect">
             <a:avLst/>
@@ -10793,7 +11575,7 @@
               </a:spcAft>
             </a:pPr>
             <a:r>
-              <a:rPr sz="1300">
+              <a:rPr sz="1600">
                 <a:solidFill>
                   <a:srgbClr val="333333"/>
                 </a:solidFill>
@@ -10809,7 +11591,7 @@
               </a:spcAft>
             </a:pPr>
             <a:r>
-              <a:rPr sz="1300">
+              <a:rPr sz="1600">
                 <a:solidFill>
                   <a:srgbClr val="333333"/>
                 </a:solidFill>
@@ -10825,7 +11607,7 @@
               </a:spcAft>
             </a:pPr>
             <a:r>
-              <a:rPr sz="1300">
+              <a:rPr sz="1600">
                 <a:solidFill>
                   <a:srgbClr val="333333"/>
                 </a:solidFill>
@@ -10971,7 +11753,7 @@
         <p:spPr>
           <a:xfrm>
             <a:off x="6537959" y="2514600"/>
-            <a:ext cx="4754879" cy="1280160"/>
+            <a:ext cx="4754879" cy="907941"/>
           </a:xfrm>
           <a:prstGeom prst="rect">
             <a:avLst/>
@@ -10990,7 +11772,7 @@
               </a:spcAft>
             </a:pPr>
             <a:r>
-              <a:rPr sz="1300">
+              <a:rPr sz="1600">
                 <a:solidFill>
                   <a:srgbClr val="333333"/>
                 </a:solidFill>
@@ -11006,7 +11788,7 @@
               </a:spcAft>
             </a:pPr>
             <a:r>
-              <a:rPr sz="1300">
+              <a:rPr sz="1600">
                 <a:solidFill>
                   <a:srgbClr val="333333"/>
                 </a:solidFill>
@@ -11022,7 +11804,7 @@
               </a:spcAft>
             </a:pPr>
             <a:r>
-              <a:rPr sz="1300">
+              <a:rPr sz="1600">
                 <a:solidFill>
                   <a:srgbClr val="333333"/>
                 </a:solidFill>
@@ -11168,7 +11950,7 @@
         <p:spPr>
           <a:xfrm>
             <a:off x="1097280" y="4526280"/>
-            <a:ext cx="4754879" cy="1280160"/>
+            <a:ext cx="4754879" cy="907941"/>
           </a:xfrm>
           <a:prstGeom prst="rect">
             <a:avLst/>
@@ -11187,7 +11969,7 @@
               </a:spcAft>
             </a:pPr>
             <a:r>
-              <a:rPr sz="1300">
+              <a:rPr sz="1600" dirty="0">
                 <a:solidFill>
                   <a:srgbClr val="333333"/>
                 </a:solidFill>
@@ -11203,13 +11985,31 @@
               </a:spcAft>
             </a:pPr>
             <a:r>
-              <a:rPr sz="1300">
-                <a:solidFill>
-                  <a:srgbClr val="333333"/>
-                </a:solidFill>
-                <a:latin typeface="Calibri"/>
-              </a:rPr>
-              <a:t>Bundles BitBake + OE-Core + reference distro</a:t>
+              <a:rPr sz="1600" dirty="0">
+                <a:solidFill>
+                  <a:srgbClr val="333333"/>
+                </a:solidFill>
+                <a:latin typeface="Calibri"/>
+              </a:rPr>
+              <a:t>Bundles </a:t>
+            </a:r>
+            <a:r>
+              <a:rPr sz="1600" dirty="0" err="1">
+                <a:solidFill>
+                  <a:srgbClr val="333333"/>
+                </a:solidFill>
+                <a:latin typeface="Calibri"/>
+              </a:rPr>
+              <a:t>BitBake</a:t>
+            </a:r>
+            <a:r>
+              <a:rPr sz="1600" dirty="0">
+                <a:solidFill>
+                  <a:srgbClr val="333333"/>
+                </a:solidFill>
+                <a:latin typeface="Calibri"/>
+              </a:rPr>
+              <a:t> + OE-Core + reference distro</a:t>
             </a:r>
           </a:p>
           <a:p>
@@ -11219,13 +12019,31 @@
               </a:spcAft>
             </a:pPr>
             <a:r>
-              <a:rPr sz="1300">
-                <a:solidFill>
-                  <a:srgbClr val="333333"/>
-                </a:solidFill>
-                <a:latin typeface="Calibri"/>
-              </a:rPr>
-              <a:t>Your starting point — clone this</a:t>
+              <a:rPr sz="1600" dirty="0">
+                <a:solidFill>
+                  <a:srgbClr val="333333"/>
+                </a:solidFill>
+                <a:latin typeface="Calibri"/>
+              </a:rPr>
+              <a:t>Your starting point </a:t>
+            </a:r>
+            <a:r>
+              <a:rPr lang="en-IN" sz="1600" dirty="0">
+                <a:solidFill>
+                  <a:srgbClr val="333333"/>
+                </a:solidFill>
+                <a:latin typeface="Calibri"/>
+              </a:rPr>
+              <a:t>-</a:t>
+            </a:r>
+            <a:r>
+              <a:rPr sz="1600" dirty="0">
+                <a:solidFill>
+                  <a:srgbClr val="333333"/>
+                </a:solidFill>
+                <a:latin typeface="Calibri"/>
+              </a:rPr>
+              <a:t> clone this</a:t>
             </a:r>
           </a:p>
         </p:txBody>
@@ -11365,7 +12183,7 @@
         <p:spPr>
           <a:xfrm>
             <a:off x="6537959" y="4526280"/>
-            <a:ext cx="4754879" cy="1280160"/>
+            <a:ext cx="4754879" cy="907941"/>
           </a:xfrm>
           <a:prstGeom prst="rect">
             <a:avLst/>
@@ -11384,7 +12202,7 @@
               </a:spcAft>
             </a:pPr>
             <a:r>
-              <a:rPr sz="1300">
+              <a:rPr sz="1600">
                 <a:solidFill>
                   <a:srgbClr val="333333"/>
                 </a:solidFill>
@@ -11400,7 +12218,7 @@
               </a:spcAft>
             </a:pPr>
             <a:r>
-              <a:rPr sz="1300">
+              <a:rPr sz="1600">
                 <a:solidFill>
                   <a:srgbClr val="333333"/>
                 </a:solidFill>
@@ -11416,7 +12234,7 @@
               </a:spcAft>
             </a:pPr>
             <a:r>
-              <a:rPr sz="1300">
+              <a:rPr sz="1600">
                 <a:solidFill>
                   <a:srgbClr val="333333"/>
                 </a:solidFill>
@@ -11468,13 +12286,22 @@
           <a:lstStyle/>
           <a:p>
             <a:r>
-              <a:rPr sz="3200" b="1">
-                <a:solidFill>
-                  <a:srgbClr val="CC0066"/>
-                </a:solidFill>
-                <a:latin typeface="Calibri"/>
-              </a:rPr>
-              <a:t>Poky — The Reference Build</a:t>
+              <a:rPr sz="3200" b="1" dirty="0">
+                <a:latin typeface="Calibri"/>
+              </a:rPr>
+              <a:t>Poky </a:t>
+            </a:r>
+            <a:r>
+              <a:rPr lang="en-IN" sz="3200" b="1" dirty="0">
+                <a:latin typeface="Calibri"/>
+              </a:rPr>
+              <a:t>:</a:t>
+            </a:r>
+            <a:r>
+              <a:rPr sz="3200" b="1" dirty="0">
+                <a:latin typeface="Calibri"/>
+              </a:rPr>
+              <a:t>The Reference Build</a:t>
             </a:r>
           </a:p>
         </p:txBody>
@@ -11649,8 +12476,8 @@
         </p:nvSpPr>
         <p:spPr>
           <a:xfrm>
-            <a:off x="1005840" y="2423160"/>
-            <a:ext cx="4846320" cy="2560320"/>
+            <a:off x="1005840" y="2331720"/>
+            <a:ext cx="4846320" cy="2800767"/>
           </a:xfrm>
           <a:prstGeom prst="rect">
             <a:avLst/>
@@ -11669,7 +12496,7 @@
               </a:spcAft>
             </a:pPr>
             <a:r>
-              <a:rPr sz="1100">
+              <a:rPr sz="1600" dirty="0">
                 <a:solidFill>
                   <a:srgbClr val="2D2D2D"/>
                 </a:solidFill>
@@ -11685,13 +12512,31 @@
               </a:spcAft>
             </a:pPr>
             <a:r>
-              <a:rPr sz="1100">
+              <a:rPr sz="1600" dirty="0">
                 <a:solidFill>
                   <a:srgbClr val="2D2D2D"/>
                 </a:solidFill>
                 <a:latin typeface="Consolas"/>
               </a:rPr>
-              <a:t>├── bitbake/         # The build engine</a:t>
+              <a:t>├── </a:t>
+            </a:r>
+            <a:r>
+              <a:rPr sz="1600" dirty="0" err="1">
+                <a:solidFill>
+                  <a:srgbClr val="2D2D2D"/>
+                </a:solidFill>
+                <a:latin typeface="Consolas"/>
+              </a:rPr>
+              <a:t>bitbake</a:t>
+            </a:r>
+            <a:r>
+              <a:rPr sz="1600" dirty="0">
+                <a:solidFill>
+                  <a:srgbClr val="2D2D2D"/>
+                </a:solidFill>
+                <a:latin typeface="Consolas"/>
+              </a:rPr>
+              <a:t>/         # The build engine</a:t>
             </a:r>
           </a:p>
           <a:p>
@@ -11701,13 +12546,31 @@
               </a:spcAft>
             </a:pPr>
             <a:r>
-              <a:rPr sz="1100">
+              <a:rPr sz="1600" dirty="0">
                 <a:solidFill>
                   <a:srgbClr val="2D2D2D"/>
                 </a:solidFill>
                 <a:latin typeface="Consolas"/>
               </a:rPr>
-              <a:t>├── meta/            # OpenEmbedded-Core</a:t>
+              <a:t>├── meta/            # </a:t>
+            </a:r>
+            <a:r>
+              <a:rPr sz="1600" dirty="0" err="1">
+                <a:solidFill>
+                  <a:srgbClr val="2D2D2D"/>
+                </a:solidFill>
+                <a:latin typeface="Consolas"/>
+              </a:rPr>
+              <a:t>OpenEmbedded</a:t>
+            </a:r>
+            <a:r>
+              <a:rPr sz="1600" dirty="0">
+                <a:solidFill>
+                  <a:srgbClr val="2D2D2D"/>
+                </a:solidFill>
+                <a:latin typeface="Consolas"/>
+              </a:rPr>
+              <a:t>-Core</a:t>
             </a:r>
           </a:p>
           <a:p>
@@ -11717,7 +12580,7 @@
               </a:spcAft>
             </a:pPr>
             <a:r>
-              <a:rPr sz="1100">
+              <a:rPr sz="1600" dirty="0">
                 <a:solidFill>
                   <a:srgbClr val="2D2D2D"/>
                 </a:solidFill>
@@ -11733,13 +12596,31 @@
               </a:spcAft>
             </a:pPr>
             <a:r>
-              <a:rPr sz="1100">
+              <a:rPr sz="1600" dirty="0">
                 <a:solidFill>
                   <a:srgbClr val="2D2D2D"/>
                 </a:solidFill>
                 <a:latin typeface="Consolas"/>
               </a:rPr>
-              <a:t>├── meta-yocto-bsp/  # Reference BSPs</a:t>
+              <a:t>├── meta-yocto-</a:t>
+            </a:r>
+            <a:r>
+              <a:rPr sz="1600" dirty="0" err="1">
+                <a:solidFill>
+                  <a:srgbClr val="2D2D2D"/>
+                </a:solidFill>
+                <a:latin typeface="Consolas"/>
+              </a:rPr>
+              <a:t>bsp</a:t>
+            </a:r>
+            <a:r>
+              <a:rPr sz="1600" dirty="0">
+                <a:solidFill>
+                  <a:srgbClr val="2D2D2D"/>
+                </a:solidFill>
+                <a:latin typeface="Consolas"/>
+              </a:rPr>
+              <a:t>/  # Reference BSPs</a:t>
             </a:r>
           </a:p>
           <a:p>
@@ -11749,13 +12630,31 @@
               </a:spcAft>
             </a:pPr>
             <a:r>
-              <a:rPr sz="1100">
+              <a:rPr sz="1600" dirty="0">
                 <a:solidFill>
                   <a:srgbClr val="2D2D2D"/>
                 </a:solidFill>
                 <a:latin typeface="Consolas"/>
               </a:rPr>
-              <a:t>├── meta-selftest/   # Self-tests</a:t>
+              <a:t>├── meta-</a:t>
+            </a:r>
+            <a:r>
+              <a:rPr sz="1600" dirty="0" err="1">
+                <a:solidFill>
+                  <a:srgbClr val="2D2D2D"/>
+                </a:solidFill>
+                <a:latin typeface="Consolas"/>
+              </a:rPr>
+              <a:t>selftest</a:t>
+            </a:r>
+            <a:r>
+              <a:rPr sz="1600" dirty="0">
+                <a:solidFill>
+                  <a:srgbClr val="2D2D2D"/>
+                </a:solidFill>
+                <a:latin typeface="Consolas"/>
+              </a:rPr>
+              <a:t>/   # Self-tests</a:t>
             </a:r>
           </a:p>
           <a:p>
@@ -11765,7 +12664,7 @@
               </a:spcAft>
             </a:pPr>
             <a:r>
-              <a:rPr sz="1100">
+              <a:rPr sz="1600" dirty="0">
                 <a:solidFill>
                   <a:srgbClr val="2D2D2D"/>
                 </a:solidFill>
@@ -11781,7 +12680,7 @@
               </a:spcAft>
             </a:pPr>
             <a:r>
-              <a:rPr sz="1100">
+              <a:rPr sz="1600" dirty="0">
                 <a:solidFill>
                   <a:srgbClr val="2D2D2D"/>
                 </a:solidFill>
@@ -11797,7 +12696,7 @@
               </a:spcAft>
             </a:pPr>
             <a:r>
-              <a:rPr sz="1100">
+              <a:rPr sz="1600" dirty="0">
                 <a:solidFill>
                   <a:srgbClr val="2D2D2D"/>
                 </a:solidFill>
@@ -11943,8 +12842,8 @@
         </p:nvSpPr>
         <p:spPr>
           <a:xfrm>
-            <a:off x="6446520" y="2423160"/>
-            <a:ext cx="4846320" cy="1280160"/>
+            <a:off x="6400800" y="2313039"/>
+            <a:ext cx="4846320" cy="1569660"/>
           </a:xfrm>
           <a:prstGeom prst="rect">
             <a:avLst/>
@@ -11963,7 +12862,7 @@
               </a:spcAft>
             </a:pPr>
             <a:r>
-              <a:rPr sz="1200" i="1">
+              <a:rPr sz="1600" i="1" dirty="0">
                 <a:solidFill>
                   <a:srgbClr val="808080"/>
                 </a:solidFill>
@@ -11979,13 +12878,31 @@
               </a:spcAft>
             </a:pPr>
             <a:r>
-              <a:rPr sz="1200">
+              <a:rPr sz="1600" dirty="0">
                 <a:solidFill>
                   <a:srgbClr val="2D2D2D"/>
                 </a:solidFill>
                 <a:latin typeface="Consolas"/>
               </a:rPr>
-              <a:t>git clone -b scarthgap \</a:t>
+              <a:t>git clone -b </a:t>
+            </a:r>
+            <a:r>
+              <a:rPr sz="1600" dirty="0" err="1">
+                <a:solidFill>
+                  <a:srgbClr val="2D2D2D"/>
+                </a:solidFill>
+                <a:latin typeface="Consolas"/>
+              </a:rPr>
+              <a:t>scarthgap</a:t>
+            </a:r>
+            <a:r>
+              <a:rPr sz="1600" dirty="0">
+                <a:solidFill>
+                  <a:srgbClr val="2D2D2D"/>
+                </a:solidFill>
+                <a:latin typeface="Consolas"/>
+              </a:rPr>
+              <a:t> \</a:t>
             </a:r>
           </a:p>
           <a:p>
@@ -11995,7 +12912,7 @@
               </a:spcAft>
             </a:pPr>
             <a:r>
-              <a:rPr sz="1200">
+              <a:rPr sz="1600" dirty="0">
                 <a:solidFill>
                   <a:srgbClr val="2D2D2D"/>
                 </a:solidFill>
@@ -12011,7 +12928,7 @@
               </a:spcAft>
             </a:pPr>
             <a:r>
-              <a:rPr sz="1200">
+              <a:rPr sz="1600" dirty="0">
                 <a:solidFill>
                   <a:srgbClr val="2D2D2D"/>
                 </a:solidFill>
@@ -12027,7 +12944,7 @@
               </a:spcAft>
             </a:pPr>
             <a:r>
-              <a:rPr sz="1200">
+              <a:rPr sz="1600" dirty="0">
                 <a:solidFill>
                   <a:srgbClr val="2D2D2D"/>
                 </a:solidFill>
@@ -12043,7 +12960,7 @@
               </a:spcAft>
             </a:pPr>
             <a:r>
-              <a:rPr sz="1200">
+              <a:rPr sz="1600" dirty="0">
                 <a:solidFill>
                   <a:srgbClr val="2D2D2D"/>
                 </a:solidFill>
@@ -12063,7 +12980,7 @@
         <p:spPr>
           <a:xfrm>
             <a:off x="6263640" y="3931920"/>
-            <a:ext cx="5120640" cy="1645920"/>
+            <a:ext cx="5120640" cy="1508105"/>
           </a:xfrm>
           <a:prstGeom prst="rect">
             <a:avLst/>
@@ -12082,7 +12999,7 @@
               </a:spcAft>
             </a:pPr>
             <a:r>
-              <a:rPr sz="1400" b="1">
+              <a:rPr b="1" dirty="0">
                 <a:solidFill>
                   <a:srgbClr val="663399"/>
                 </a:solidFill>
@@ -12098,13 +13015,49 @@
               </a:spcAft>
             </a:pPr>
             <a:r>
-              <a:rPr sz="1200" b="0">
-                <a:solidFill>
-                  <a:srgbClr val="333333"/>
-                </a:solidFill>
-                <a:latin typeface="Calibri"/>
-              </a:rPr>
-              <a:t>• It picks systemd, glibc, defaults you may not want</a:t>
+              <a:rPr sz="1600" b="0" dirty="0">
+                <a:solidFill>
+                  <a:srgbClr val="333333"/>
+                </a:solidFill>
+                <a:latin typeface="Calibri"/>
+              </a:rPr>
+              <a:t>• It picks </a:t>
+            </a:r>
+            <a:r>
+              <a:rPr sz="1600" b="0" dirty="0" err="1">
+                <a:solidFill>
+                  <a:srgbClr val="333333"/>
+                </a:solidFill>
+                <a:latin typeface="Calibri"/>
+              </a:rPr>
+              <a:t>systemd</a:t>
+            </a:r>
+            <a:r>
+              <a:rPr sz="1600" b="0" dirty="0">
+                <a:solidFill>
+                  <a:srgbClr val="333333"/>
+                </a:solidFill>
+                <a:latin typeface="Calibri"/>
+              </a:rPr>
+              <a:t>, </a:t>
+            </a:r>
+            <a:r>
+              <a:rPr sz="1600" b="0" dirty="0" err="1">
+                <a:solidFill>
+                  <a:srgbClr val="333333"/>
+                </a:solidFill>
+                <a:latin typeface="Calibri"/>
+              </a:rPr>
+              <a:t>glibc</a:t>
+            </a:r>
+            <a:r>
+              <a:rPr sz="1600" b="0" dirty="0">
+                <a:solidFill>
+                  <a:srgbClr val="333333"/>
+                </a:solidFill>
+                <a:latin typeface="Calibri"/>
+              </a:rPr>
+              <a:t>, defaults you may not want</a:t>
             </a:r>
           </a:p>
           <a:p>
@@ -12114,13 +13067,31 @@
               </a:spcAft>
             </a:pPr>
             <a:r>
-              <a:rPr sz="1200" b="0">
-                <a:solidFill>
-                  <a:srgbClr val="333333"/>
-                </a:solidFill>
-                <a:latin typeface="Calibri"/>
-              </a:rPr>
-              <a:t>• That's fine — you override via your own distro config</a:t>
+              <a:rPr sz="1600" b="0" dirty="0">
+                <a:solidFill>
+                  <a:srgbClr val="333333"/>
+                </a:solidFill>
+                <a:latin typeface="Calibri"/>
+              </a:rPr>
+              <a:t>• That's fine </a:t>
+            </a:r>
+            <a:r>
+              <a:rPr lang="en-IN" sz="1600" b="0" dirty="0">
+                <a:solidFill>
+                  <a:srgbClr val="333333"/>
+                </a:solidFill>
+                <a:latin typeface="Calibri"/>
+              </a:rPr>
+              <a:t>-</a:t>
+            </a:r>
+            <a:r>
+              <a:rPr sz="1600" b="0" dirty="0">
+                <a:solidFill>
+                  <a:srgbClr val="333333"/>
+                </a:solidFill>
+                <a:latin typeface="Calibri"/>
+              </a:rPr>
+              <a:t> you override via your own distro config</a:t>
             </a:r>
           </a:p>
           <a:p>
@@ -12130,7 +13101,7 @@
               </a:spcAft>
             </a:pPr>
             <a:r>
-              <a:rPr sz="1200" b="0">
+              <a:rPr sz="1600" b="0" dirty="0">
                 <a:solidFill>
                   <a:srgbClr val="333333"/>
                 </a:solidFill>
@@ -12182,13 +13153,16 @@
           <a:lstStyle/>
           <a:p>
             <a:r>
-              <a:rPr sz="3200" b="1">
-                <a:solidFill>
-                  <a:srgbClr val="CC0066"/>
-                </a:solidFill>
-                <a:latin typeface="Calibri"/>
-              </a:rPr>
-              <a:t>OpenEmbedded-Core (OE-Core)</a:t>
+              <a:rPr sz="3200" b="1" dirty="0" err="1">
+                <a:latin typeface="Calibri"/>
+              </a:rPr>
+              <a:t>OpenEmbedded</a:t>
+            </a:r>
+            <a:r>
+              <a:rPr sz="3200" b="1" dirty="0">
+                <a:latin typeface="Calibri"/>
+              </a:rPr>
+              <a:t>-Core (OE-Core)</a:t>
             </a:r>
           </a:p>
         </p:txBody>
@@ -12202,7 +13176,7 @@
         <p:spPr>
           <a:xfrm>
             <a:off x="822960" y="1417320"/>
-            <a:ext cx="10515600" cy="365760"/>
+            <a:ext cx="10515600" cy="338554"/>
           </a:xfrm>
           <a:prstGeom prst="rect">
             <a:avLst/>
@@ -12217,7 +13191,7 @@
           <a:p>
             <a:pPr algn="l"/>
             <a:r>
-              <a:rPr sz="1500" b="0">
+              <a:rPr sz="1600" b="0">
                 <a:solidFill>
                   <a:srgbClr val="666666"/>
                 </a:solidFill>
@@ -12237,7 +13211,7 @@
         <p:spPr>
           <a:xfrm>
             <a:off x="822960" y="1874519"/>
-            <a:ext cx="10515600" cy="4297680"/>
+            <a:ext cx="10515600" cy="3790781"/>
           </a:xfrm>
           <a:prstGeom prst="rect">
             <a:avLst/>
@@ -12256,7 +13230,7 @@
               </a:spcAft>
             </a:pPr>
             <a:r>
-              <a:rPr sz="1800" b="1">
+              <a:rPr sz="2000" b="1" dirty="0">
                 <a:solidFill>
                   <a:srgbClr val="CC0066"/>
                 </a:solidFill>
@@ -12272,13 +13246,31 @@
               </a:spcAft>
             </a:pPr>
             <a:r>
-              <a:rPr sz="1400" b="0">
-                <a:solidFill>
-                  <a:srgbClr val="333333"/>
-                </a:solidFill>
-                <a:latin typeface="Calibri"/>
-              </a:rPr>
-              <a:t>poky/meta/  — that directory is OE-Core</a:t>
+              <a:rPr sz="1600" b="0" dirty="0">
+                <a:solidFill>
+                  <a:srgbClr val="333333"/>
+                </a:solidFill>
+                <a:latin typeface="Calibri"/>
+              </a:rPr>
+              <a:t>poky/meta/  </a:t>
+            </a:r>
+            <a:r>
+              <a:rPr lang="en-IN" sz="1600" dirty="0">
+                <a:solidFill>
+                  <a:srgbClr val="333333"/>
+                </a:solidFill>
+                <a:latin typeface="Calibri"/>
+              </a:rPr>
+              <a:t>:</a:t>
+            </a:r>
+            <a:r>
+              <a:rPr sz="1600" b="0" dirty="0">
+                <a:solidFill>
+                  <a:srgbClr val="333333"/>
+                </a:solidFill>
+                <a:latin typeface="Calibri"/>
+              </a:rPr>
+              <a:t> that directory is OE-Core</a:t>
             </a:r>
           </a:p>
           <a:p>
@@ -12288,7 +13280,7 @@
               </a:spcAft>
             </a:pPr>
             <a:r>
-              <a:rPr sz="1800" b="1">
+              <a:rPr sz="2000" b="1" dirty="0">
                 <a:solidFill>
                   <a:srgbClr val="CC0066"/>
                 </a:solidFill>
@@ -12304,13 +13296,121 @@
               </a:spcAft>
             </a:pPr>
             <a:r>
-              <a:rPr sz="1400" b="0">
-                <a:solidFill>
-                  <a:srgbClr val="333333"/>
-                </a:solidFill>
-                <a:latin typeface="Calibri"/>
-              </a:rPr>
-              <a:t>• Common recipes — busybox, glibc, openssh, systemd, perl, python3, ...</a:t>
+              <a:rPr sz="1600" b="0" dirty="0">
+                <a:solidFill>
+                  <a:srgbClr val="333333"/>
+                </a:solidFill>
+                <a:latin typeface="Calibri"/>
+              </a:rPr>
+              <a:t>• Common recipes </a:t>
+            </a:r>
+            <a:r>
+              <a:rPr lang="en-IN" sz="1600" b="0" dirty="0">
+                <a:solidFill>
+                  <a:srgbClr val="333333"/>
+                </a:solidFill>
+                <a:latin typeface="Calibri"/>
+              </a:rPr>
+              <a:t>-</a:t>
+            </a:r>
+            <a:r>
+              <a:rPr sz="1600" b="0" dirty="0">
+                <a:solidFill>
+                  <a:srgbClr val="333333"/>
+                </a:solidFill>
+                <a:latin typeface="Calibri"/>
+              </a:rPr>
+              <a:t> </a:t>
+            </a:r>
+            <a:r>
+              <a:rPr sz="1600" b="0" dirty="0" err="1">
+                <a:solidFill>
+                  <a:srgbClr val="333333"/>
+                </a:solidFill>
+                <a:latin typeface="Calibri"/>
+              </a:rPr>
+              <a:t>busybox</a:t>
+            </a:r>
+            <a:r>
+              <a:rPr sz="1600" b="0" dirty="0">
+                <a:solidFill>
+                  <a:srgbClr val="333333"/>
+                </a:solidFill>
+                <a:latin typeface="Calibri"/>
+              </a:rPr>
+              <a:t>, </a:t>
+            </a:r>
+            <a:r>
+              <a:rPr sz="1600" b="0" dirty="0" err="1">
+                <a:solidFill>
+                  <a:srgbClr val="333333"/>
+                </a:solidFill>
+                <a:latin typeface="Calibri"/>
+              </a:rPr>
+              <a:t>glibc</a:t>
+            </a:r>
+            <a:r>
+              <a:rPr sz="1600" b="0" dirty="0">
+                <a:solidFill>
+                  <a:srgbClr val="333333"/>
+                </a:solidFill>
+                <a:latin typeface="Calibri"/>
+              </a:rPr>
+              <a:t>, </a:t>
+            </a:r>
+            <a:r>
+              <a:rPr sz="1600" b="0" dirty="0" err="1">
+                <a:solidFill>
+                  <a:srgbClr val="333333"/>
+                </a:solidFill>
+                <a:latin typeface="Calibri"/>
+              </a:rPr>
+              <a:t>openssh</a:t>
+            </a:r>
+            <a:r>
+              <a:rPr sz="1600" b="0" dirty="0">
+                <a:solidFill>
+                  <a:srgbClr val="333333"/>
+                </a:solidFill>
+                <a:latin typeface="Calibri"/>
+              </a:rPr>
+              <a:t>, </a:t>
+            </a:r>
+            <a:r>
+              <a:rPr sz="1600" b="0" dirty="0" err="1">
+                <a:solidFill>
+                  <a:srgbClr val="333333"/>
+                </a:solidFill>
+                <a:latin typeface="Calibri"/>
+              </a:rPr>
+              <a:t>systemd</a:t>
+            </a:r>
+            <a:r>
+              <a:rPr sz="1600" b="0" dirty="0">
+                <a:solidFill>
+                  <a:srgbClr val="333333"/>
+                </a:solidFill>
+                <a:latin typeface="Calibri"/>
+              </a:rPr>
+              <a:t>, </a:t>
+            </a:r>
+            <a:r>
+              <a:rPr sz="1600" b="0" dirty="0" err="1">
+                <a:solidFill>
+                  <a:srgbClr val="333333"/>
+                </a:solidFill>
+                <a:latin typeface="Calibri"/>
+              </a:rPr>
+              <a:t>perl</a:t>
+            </a:r>
+            <a:r>
+              <a:rPr sz="1600" b="0" dirty="0">
+                <a:solidFill>
+                  <a:srgbClr val="333333"/>
+                </a:solidFill>
+                <a:latin typeface="Calibri"/>
+              </a:rPr>
+              <a:t>, python3, ...</a:t>
             </a:r>
           </a:p>
           <a:p>
@@ -12320,13 +13420,85 @@
               </a:spcAft>
             </a:pPr>
             <a:r>
-              <a:rPr sz="1400" b="0">
-                <a:solidFill>
-                  <a:srgbClr val="333333"/>
-                </a:solidFill>
-                <a:latin typeface="Calibri"/>
-              </a:rPr>
-              <a:t>• Toolchain machinery — cross-gcc, cross-binutils, sysroot setup</a:t>
+              <a:rPr sz="1600" b="0" dirty="0">
+                <a:solidFill>
+                  <a:srgbClr val="333333"/>
+                </a:solidFill>
+                <a:latin typeface="Calibri"/>
+              </a:rPr>
+              <a:t>• Toolchain machinery </a:t>
+            </a:r>
+            <a:r>
+              <a:rPr lang="en-IN" sz="1600" b="0" dirty="0">
+                <a:solidFill>
+                  <a:srgbClr val="333333"/>
+                </a:solidFill>
+                <a:latin typeface="Calibri"/>
+              </a:rPr>
+              <a:t>-</a:t>
+            </a:r>
+            <a:r>
+              <a:rPr sz="1600" b="0" dirty="0">
+                <a:solidFill>
+                  <a:srgbClr val="333333"/>
+                </a:solidFill>
+                <a:latin typeface="Calibri"/>
+              </a:rPr>
+              <a:t> cross-</a:t>
+            </a:r>
+            <a:r>
+              <a:rPr sz="1600" b="0" dirty="0" err="1">
+                <a:solidFill>
+                  <a:srgbClr val="333333"/>
+                </a:solidFill>
+                <a:latin typeface="Calibri"/>
+              </a:rPr>
+              <a:t>gcc</a:t>
+            </a:r>
+            <a:r>
+              <a:rPr sz="1600" b="0" dirty="0">
+                <a:solidFill>
+                  <a:srgbClr val="333333"/>
+                </a:solidFill>
+                <a:latin typeface="Calibri"/>
+              </a:rPr>
+              <a:t>, cross-</a:t>
+            </a:r>
+            <a:r>
+              <a:rPr sz="1600" b="0" dirty="0" err="1">
+                <a:solidFill>
+                  <a:srgbClr val="333333"/>
+                </a:solidFill>
+                <a:latin typeface="Calibri"/>
+              </a:rPr>
+              <a:t>binutils</a:t>
+            </a:r>
+            <a:r>
+              <a:rPr sz="1600" b="0" dirty="0">
+                <a:solidFill>
+                  <a:srgbClr val="333333"/>
+                </a:solidFill>
+                <a:latin typeface="Calibri"/>
+              </a:rPr>
+              <a:t>, </a:t>
+            </a:r>
+            <a:r>
+              <a:rPr sz="1600" b="0" dirty="0" err="1">
+                <a:solidFill>
+                  <a:srgbClr val="333333"/>
+                </a:solidFill>
+                <a:latin typeface="Calibri"/>
+              </a:rPr>
+              <a:t>sysroot</a:t>
+            </a:r>
+            <a:r>
+              <a:rPr sz="1600" b="0" dirty="0">
+                <a:solidFill>
+                  <a:srgbClr val="333333"/>
+                </a:solidFill>
+                <a:latin typeface="Calibri"/>
+              </a:rPr>
+              <a:t> setup</a:t>
             </a:r>
           </a:p>
           <a:p>
@@ -12336,13 +13508,85 @@
               </a:spcAft>
             </a:pPr>
             <a:r>
-              <a:rPr sz="1400" b="0">
-                <a:solidFill>
-                  <a:srgbClr val="333333"/>
-                </a:solidFill>
-                <a:latin typeface="Calibri"/>
-              </a:rPr>
-              <a:t>• Common classes (.bbclass) — autotools, cmake, meson, kernel, module, image</a:t>
+              <a:rPr sz="1600" b="0" dirty="0">
+                <a:solidFill>
+                  <a:srgbClr val="333333"/>
+                </a:solidFill>
+                <a:latin typeface="Calibri"/>
+              </a:rPr>
+              <a:t>• Common classes (.</a:t>
+            </a:r>
+            <a:r>
+              <a:rPr sz="1600" b="0" dirty="0" err="1">
+                <a:solidFill>
+                  <a:srgbClr val="333333"/>
+                </a:solidFill>
+                <a:latin typeface="Calibri"/>
+              </a:rPr>
+              <a:t>bbclass</a:t>
+            </a:r>
+            <a:r>
+              <a:rPr sz="1600" b="0" dirty="0">
+                <a:solidFill>
+                  <a:srgbClr val="333333"/>
+                </a:solidFill>
+                <a:latin typeface="Calibri"/>
+              </a:rPr>
+              <a:t>) </a:t>
+            </a:r>
+            <a:r>
+              <a:rPr lang="en-IN" sz="1600" b="0" dirty="0">
+                <a:solidFill>
+                  <a:srgbClr val="333333"/>
+                </a:solidFill>
+                <a:latin typeface="Calibri"/>
+              </a:rPr>
+              <a:t>-</a:t>
+            </a:r>
+            <a:r>
+              <a:rPr sz="1600" b="0" dirty="0">
+                <a:solidFill>
+                  <a:srgbClr val="333333"/>
+                </a:solidFill>
+                <a:latin typeface="Calibri"/>
+              </a:rPr>
+              <a:t> </a:t>
+            </a:r>
+            <a:r>
+              <a:rPr sz="1600" b="0" dirty="0" err="1">
+                <a:solidFill>
+                  <a:srgbClr val="333333"/>
+                </a:solidFill>
+                <a:latin typeface="Calibri"/>
+              </a:rPr>
+              <a:t>autotools</a:t>
+            </a:r>
+            <a:r>
+              <a:rPr sz="1600" b="0" dirty="0">
+                <a:solidFill>
+                  <a:srgbClr val="333333"/>
+                </a:solidFill>
+                <a:latin typeface="Calibri"/>
+              </a:rPr>
+              <a:t>, </a:t>
+            </a:r>
+            <a:r>
+              <a:rPr sz="1600" b="0" dirty="0" err="1">
+                <a:solidFill>
+                  <a:srgbClr val="333333"/>
+                </a:solidFill>
+                <a:latin typeface="Calibri"/>
+              </a:rPr>
+              <a:t>cmake</a:t>
+            </a:r>
+            <a:r>
+              <a:rPr sz="1600" b="0" dirty="0">
+                <a:solidFill>
+                  <a:srgbClr val="333333"/>
+                </a:solidFill>
+                <a:latin typeface="Calibri"/>
+              </a:rPr>
+              <a:t>, meson, kernel, module, image</a:t>
             </a:r>
           </a:p>
           <a:p>
@@ -12352,13 +13596,67 @@
               </a:spcAft>
             </a:pPr>
             <a:r>
-              <a:rPr sz="1400" b="0">
-                <a:solidFill>
-                  <a:srgbClr val="333333"/>
-                </a:solidFill>
-                <a:latin typeface="Calibri"/>
-              </a:rPr>
-              <a:t>• Reference machines — qemux86, qemuarm, qemuarm64 (boards in meta-yocto-bsp)</a:t>
+              <a:rPr sz="1600" b="0" dirty="0">
+                <a:solidFill>
+                  <a:srgbClr val="333333"/>
+                </a:solidFill>
+                <a:latin typeface="Calibri"/>
+              </a:rPr>
+              <a:t>• Reference machines </a:t>
+            </a:r>
+            <a:r>
+              <a:rPr lang="en-IN" sz="1600" b="0" dirty="0">
+                <a:solidFill>
+                  <a:srgbClr val="333333"/>
+                </a:solidFill>
+                <a:latin typeface="Calibri"/>
+              </a:rPr>
+              <a:t>-</a:t>
+            </a:r>
+            <a:r>
+              <a:rPr sz="1600" b="0" dirty="0">
+                <a:solidFill>
+                  <a:srgbClr val="333333"/>
+                </a:solidFill>
+                <a:latin typeface="Calibri"/>
+              </a:rPr>
+              <a:t> qemux86, </a:t>
+            </a:r>
+            <a:r>
+              <a:rPr sz="1600" b="0" dirty="0" err="1">
+                <a:solidFill>
+                  <a:srgbClr val="333333"/>
+                </a:solidFill>
+                <a:latin typeface="Calibri"/>
+              </a:rPr>
+              <a:t>qemuarm</a:t>
+            </a:r>
+            <a:r>
+              <a:rPr sz="1600" b="0" dirty="0">
+                <a:solidFill>
+                  <a:srgbClr val="333333"/>
+                </a:solidFill>
+                <a:latin typeface="Calibri"/>
+              </a:rPr>
+              <a:t>, qemuarm64 (boards in meta-yocto-</a:t>
+            </a:r>
+            <a:r>
+              <a:rPr sz="1600" b="0" dirty="0" err="1">
+                <a:solidFill>
+                  <a:srgbClr val="333333"/>
+                </a:solidFill>
+                <a:latin typeface="Calibri"/>
+              </a:rPr>
+              <a:t>bsp</a:t>
+            </a:r>
+            <a:r>
+              <a:rPr sz="1600" b="0" dirty="0">
+                <a:solidFill>
+                  <a:srgbClr val="333333"/>
+                </a:solidFill>
+                <a:latin typeface="Calibri"/>
+              </a:rPr>
+              <a:t>)</a:t>
             </a:r>
           </a:p>
           <a:p>
@@ -12368,7 +13666,7 @@
               </a:spcAft>
             </a:pPr>
             <a:r>
-              <a:rPr sz="1800" b="1">
+              <a:rPr sz="2000" b="1" dirty="0">
                 <a:solidFill>
                   <a:srgbClr val="CC0066"/>
                 </a:solidFill>
@@ -12384,13 +13682,49 @@
               </a:spcAft>
             </a:pPr>
             <a:r>
-              <a:rPr sz="1400" b="0">
-                <a:solidFill>
-                  <a:srgbClr val="333333"/>
-                </a:solidFill>
-                <a:latin typeface="Calibri"/>
-              </a:rPr>
-              <a:t>The OpenEmbedded community + Yocto Project — shared upstream</a:t>
+              <a:rPr sz="1600" b="0" dirty="0">
+                <a:solidFill>
+                  <a:srgbClr val="333333"/>
+                </a:solidFill>
+                <a:latin typeface="Calibri"/>
+              </a:rPr>
+              <a:t>The </a:t>
+            </a:r>
+            <a:r>
+              <a:rPr sz="1600" b="0" dirty="0" err="1">
+                <a:solidFill>
+                  <a:srgbClr val="333333"/>
+                </a:solidFill>
+                <a:latin typeface="Calibri"/>
+              </a:rPr>
+              <a:t>OpenEmbedded</a:t>
+            </a:r>
+            <a:r>
+              <a:rPr sz="1600" b="0" dirty="0">
+                <a:solidFill>
+                  <a:srgbClr val="333333"/>
+                </a:solidFill>
+                <a:latin typeface="Calibri"/>
+              </a:rPr>
+              <a:t> community + </a:t>
+            </a:r>
+            <a:r>
+              <a:rPr sz="1600" b="0" dirty="0" err="1">
+                <a:solidFill>
+                  <a:srgbClr val="333333"/>
+                </a:solidFill>
+                <a:latin typeface="Calibri"/>
+              </a:rPr>
+              <a:t>Yocto</a:t>
+            </a:r>
+            <a:r>
+              <a:rPr sz="1600" b="0" dirty="0">
+                <a:solidFill>
+                  <a:srgbClr val="333333"/>
+                </a:solidFill>
+                <a:latin typeface="Calibri"/>
+              </a:rPr>
+              <a:t> Project — shared upstream</a:t>
             </a:r>
           </a:p>
           <a:p>
@@ -12400,7 +13734,7 @@
               </a:spcAft>
             </a:pPr>
             <a:r>
-              <a:rPr sz="1800" b="1">
+              <a:rPr sz="2000" b="1" dirty="0">
                 <a:solidFill>
                   <a:srgbClr val="663399"/>
                 </a:solidFill>
@@ -12416,14 +13750,47 @@
               </a:spcAft>
             </a:pPr>
             <a:r>
-              <a:rPr sz="1400" b="1">
-                <a:solidFill>
-                  <a:srgbClr val="333333"/>
-                </a:solidFill>
-                <a:latin typeface="Calibri"/>
-              </a:rPr>
-              <a:t>Poky = OE-Core + Yocto reference policies + BSP samples + BitBake</a:t>
-            </a:r>
+              <a:rPr sz="1600" b="1" dirty="0">
+                <a:solidFill>
+                  <a:srgbClr val="333333"/>
+                </a:solidFill>
+                <a:latin typeface="Calibri"/>
+              </a:rPr>
+              <a:t>Poky = OE-Core + </a:t>
+            </a:r>
+            <a:r>
+              <a:rPr sz="1600" b="1" dirty="0" err="1">
+                <a:solidFill>
+                  <a:srgbClr val="333333"/>
+                </a:solidFill>
+                <a:latin typeface="Calibri"/>
+              </a:rPr>
+              <a:t>Yocto</a:t>
+            </a:r>
+            <a:r>
+              <a:rPr sz="1600" b="1" dirty="0">
+                <a:solidFill>
+                  <a:srgbClr val="333333"/>
+                </a:solidFill>
+                <a:latin typeface="Calibri"/>
+              </a:rPr>
+              <a:t> reference policies + BSP samples + </a:t>
+            </a:r>
+            <a:r>
+              <a:rPr sz="1600" b="1" dirty="0" err="1">
+                <a:solidFill>
+                  <a:srgbClr val="333333"/>
+                </a:solidFill>
+                <a:latin typeface="Calibri"/>
+              </a:rPr>
+              <a:t>BitBake</a:t>
+            </a:r>
+            <a:endParaRPr sz="1600" b="1" dirty="0">
+              <a:solidFill>
+                <a:srgbClr val="333333"/>
+              </a:solidFill>
+              <a:latin typeface="Calibri"/>
+            </a:endParaRPr>
           </a:p>
         </p:txBody>
       </p:sp>
@@ -12468,13 +13835,22 @@
           <a:lstStyle/>
           <a:p>
             <a:r>
-              <a:rPr sz="3200" b="1">
-                <a:solidFill>
-                  <a:srgbClr val="CC0066"/>
-                </a:solidFill>
-                <a:latin typeface="Calibri"/>
-              </a:rPr>
-              <a:t>BitBake — The Build Engine</a:t>
+              <a:rPr sz="3200" b="1" dirty="0" err="1">
+                <a:latin typeface="Calibri"/>
+              </a:rPr>
+              <a:t>BitBake</a:t>
+            </a:r>
+            <a:r>
+              <a:rPr lang="en-IN" sz="3200" b="1" dirty="0">
+                <a:latin typeface="Calibri"/>
+              </a:rPr>
+              <a:t>:</a:t>
+            </a:r>
+            <a:r>
+              <a:rPr sz="3200" b="1" dirty="0">
+                <a:latin typeface="Calibri"/>
+              </a:rPr>
+              <a:t> The Build Engine</a:t>
             </a:r>
           </a:p>
         </p:txBody>
@@ -12488,7 +13864,7 @@
         <p:spPr>
           <a:xfrm>
             <a:off x="822960" y="1417320"/>
-            <a:ext cx="10515600" cy="365760"/>
+            <a:ext cx="10515600" cy="338554"/>
           </a:xfrm>
           <a:prstGeom prst="rect">
             <a:avLst/>
@@ -12503,7 +13879,7 @@
           <a:p>
             <a:pPr algn="l"/>
             <a:r>
-              <a:rPr sz="1500" b="0">
+              <a:rPr sz="1600" b="0" dirty="0">
                 <a:solidFill>
                   <a:srgbClr val="666666"/>
                 </a:solidFill>
@@ -12523,7 +13899,7 @@
         <p:spPr>
           <a:xfrm>
             <a:off x="822960" y="1874519"/>
-            <a:ext cx="5120640" cy="4114800"/>
+            <a:ext cx="5120640" cy="2544286"/>
           </a:xfrm>
           <a:prstGeom prst="rect">
             <a:avLst/>
@@ -12542,7 +13918,7 @@
               </a:spcAft>
             </a:pPr>
             <a:r>
-              <a:rPr sz="1600" b="1">
+              <a:rPr sz="2000" b="1" dirty="0">
                 <a:solidFill>
                   <a:srgbClr val="CC0066"/>
                 </a:solidFill>
@@ -12558,7 +13934,7 @@
               </a:spcAft>
             </a:pPr>
             <a:r>
-              <a:rPr sz="1300" b="0">
+              <a:rPr sz="1600" b="0" dirty="0">
                 <a:solidFill>
                   <a:srgbClr val="333333"/>
                 </a:solidFill>
@@ -12574,7 +13950,7 @@
               </a:spcAft>
             </a:pPr>
             <a:r>
-              <a:rPr sz="1600" b="1">
+              <a:rPr sz="2000" b="1" dirty="0">
                 <a:solidFill>
                   <a:srgbClr val="CC0066"/>
                 </a:solidFill>
@@ -12590,7 +13966,7 @@
               </a:spcAft>
             </a:pPr>
             <a:r>
-              <a:rPr sz="1300" b="0">
+              <a:rPr sz="1600" b="0" dirty="0">
                 <a:solidFill>
                   <a:srgbClr val="333333"/>
                 </a:solidFill>
@@ -12606,7 +13982,7 @@
               </a:spcAft>
             </a:pPr>
             <a:r>
-              <a:rPr sz="1300" b="0">
+              <a:rPr sz="1600" b="0" dirty="0">
                 <a:solidFill>
                   <a:srgbClr val="333333"/>
                 </a:solidFill>
@@ -12622,14 +13998,29 @@
               </a:spcAft>
             </a:pPr>
             <a:r>
-              <a:rPr sz="1300" b="0">
-                <a:solidFill>
-                  <a:srgbClr val="333333"/>
-                </a:solidFill>
-                <a:latin typeface="Calibri"/>
-              </a:rPr>
-              <a:t>• Caches task results in sstate</a:t>
-            </a:r>
+              <a:rPr sz="1600" b="0" dirty="0">
+                <a:solidFill>
+                  <a:srgbClr val="333333"/>
+                </a:solidFill>
+                <a:latin typeface="Calibri"/>
+              </a:rPr>
+              <a:t>• Caches task results in </a:t>
+            </a:r>
+            <a:r>
+              <a:rPr sz="1600" b="0" dirty="0" err="1">
+                <a:solidFill>
+                  <a:srgbClr val="333333"/>
+                </a:solidFill>
+                <a:latin typeface="Calibri"/>
+              </a:rPr>
+              <a:t>sstate</a:t>
+            </a:r>
+            <a:endParaRPr sz="1600" b="0" dirty="0">
+              <a:solidFill>
+                <a:srgbClr val="333333"/>
+              </a:solidFill>
+              <a:latin typeface="Calibri"/>
+            </a:endParaRPr>
           </a:p>
           <a:p>
             <a:pPr>
@@ -12638,7 +14029,7 @@
               </a:spcAft>
             </a:pPr>
             <a:r>
-              <a:rPr sz="1300" b="0">
+              <a:rPr sz="1600" b="0" dirty="0">
                 <a:solidFill>
                   <a:srgbClr val="333333"/>
                 </a:solidFill>
@@ -12785,7 +14176,7 @@
         <p:spPr>
           <a:xfrm>
             <a:off x="6446520" y="2377440"/>
-            <a:ext cx="4846320" cy="3474720"/>
+            <a:ext cx="4846320" cy="3108543"/>
           </a:xfrm>
           <a:prstGeom prst="rect">
             <a:avLst/>
@@ -12804,7 +14195,7 @@
               </a:spcAft>
             </a:pPr>
             <a:r>
-              <a:rPr sz="1100" i="1">
+              <a:rPr sz="1400" i="1">
                 <a:solidFill>
                   <a:srgbClr val="808080"/>
                 </a:solidFill>
@@ -12820,7 +14211,7 @@
               </a:spcAft>
             </a:pPr>
             <a:r>
-              <a:rPr sz="1100">
+              <a:rPr sz="1400">
                 <a:solidFill>
                   <a:srgbClr val="2D2D2D"/>
                 </a:solidFill>
@@ -12836,7 +14227,7 @@
               </a:spcAft>
             </a:pPr>
             <a:r>
-              <a:rPr sz="1100">
+              <a:rPr sz="1400">
                 <a:solidFill>
                   <a:srgbClr val="2D2D2D"/>
                 </a:solidFill>
@@ -12852,7 +14243,7 @@
               </a:spcAft>
             </a:pPr>
             <a:r>
-              <a:rPr sz="1100" i="1">
+              <a:rPr sz="1400" i="1">
                 <a:solidFill>
                   <a:srgbClr val="808080"/>
                 </a:solidFill>
@@ -12868,7 +14259,7 @@
               </a:spcAft>
             </a:pPr>
             <a:r>
-              <a:rPr sz="1100">
+              <a:rPr sz="1400">
                 <a:solidFill>
                   <a:srgbClr val="2D2D2D"/>
                 </a:solidFill>
@@ -12884,7 +14275,7 @@
               </a:spcAft>
             </a:pPr>
             <a:r>
-              <a:rPr sz="1100">
+              <a:rPr sz="1400">
                 <a:solidFill>
                   <a:srgbClr val="2D2D2D"/>
                 </a:solidFill>
@@ -12900,7 +14291,7 @@
               </a:spcAft>
             </a:pPr>
             <a:r>
-              <a:rPr sz="1100" i="1">
+              <a:rPr sz="1400" i="1">
                 <a:solidFill>
                   <a:srgbClr val="808080"/>
                 </a:solidFill>
@@ -12916,7 +14307,7 @@
               </a:spcAft>
             </a:pPr>
             <a:r>
-              <a:rPr sz="1100">
+              <a:rPr sz="1400">
                 <a:solidFill>
                   <a:srgbClr val="2D2D2D"/>
                 </a:solidFill>
@@ -12932,7 +14323,7 @@
               </a:spcAft>
             </a:pPr>
             <a:r>
-              <a:rPr sz="1100">
+              <a:rPr sz="1400">
                 <a:solidFill>
                   <a:srgbClr val="2D2D2D"/>
                 </a:solidFill>
@@ -12948,7 +14339,7 @@
               </a:spcAft>
             </a:pPr>
             <a:r>
-              <a:rPr sz="1100" i="1">
+              <a:rPr sz="1400" i="1">
                 <a:solidFill>
                   <a:srgbClr val="808080"/>
                 </a:solidFill>
@@ -12964,7 +14355,7 @@
               </a:spcAft>
             </a:pPr>
             <a:r>
-              <a:rPr sz="1100">
+              <a:rPr sz="1400">
                 <a:solidFill>
                   <a:srgbClr val="2D2D2D"/>
                 </a:solidFill>
@@ -12980,7 +14371,7 @@
               </a:spcAft>
             </a:pPr>
             <a:r>
-              <a:rPr sz="1100">
+              <a:rPr sz="1400">
                 <a:solidFill>
                   <a:srgbClr val="2D2D2D"/>
                 </a:solidFill>
@@ -12996,7 +14387,7 @@
               </a:spcAft>
             </a:pPr>
             <a:r>
-              <a:rPr sz="1100" i="1">
+              <a:rPr sz="1400" i="1">
                 <a:solidFill>
                   <a:srgbClr val="808080"/>
                 </a:solidFill>
@@ -13012,7 +14403,7 @@
               </a:spcAft>
             </a:pPr>
             <a:r>
-              <a:rPr sz="1100">
+              <a:rPr sz="1400">
                 <a:solidFill>
                   <a:srgbClr val="2D2D2D"/>
                 </a:solidFill>
@@ -13064,10 +14455,7 @@
           <a:lstStyle/>
           <a:p>
             <a:r>
-              <a:rPr sz="3200" b="1">
-                <a:solidFill>
-                  <a:srgbClr val="CC0066"/>
-                </a:solidFill>
+              <a:rPr sz="3200" b="1" dirty="0">
                 <a:latin typeface="Calibri"/>
               </a:rPr>
               <a:t>Metadata Layers</a:t>
@@ -13084,7 +14472,7 @@
         <p:spPr>
           <a:xfrm>
             <a:off x="822960" y="1417320"/>
-            <a:ext cx="10515600" cy="365760"/>
+            <a:ext cx="10515600" cy="338554"/>
           </a:xfrm>
           <a:prstGeom prst="rect">
             <a:avLst/>
@@ -13099,7 +14487,7 @@
           <a:p>
             <a:pPr algn="l"/>
             <a:r>
-              <a:rPr sz="1500" b="0">
+              <a:rPr sz="1600" b="0">
                 <a:solidFill>
                   <a:srgbClr val="666666"/>
                 </a:solidFill>
@@ -13119,7 +14507,7 @@
         <p:spPr>
           <a:xfrm>
             <a:off x="822960" y="1874519"/>
-            <a:ext cx="5120640" cy="3200400"/>
+            <a:ext cx="5120640" cy="2298065"/>
           </a:xfrm>
           <a:prstGeom prst="rect">
             <a:avLst/>
@@ -13138,7 +14526,7 @@
               </a:spcAft>
             </a:pPr>
             <a:r>
-              <a:rPr sz="1600" b="1">
+              <a:rPr sz="2000" b="1" dirty="0">
                 <a:solidFill>
                   <a:srgbClr val="CC0066"/>
                 </a:solidFill>
@@ -13154,7 +14542,7 @@
               </a:spcAft>
             </a:pPr>
             <a:r>
-              <a:rPr sz="1300" b="0">
+              <a:rPr sz="1600" b="0" dirty="0">
                 <a:solidFill>
                   <a:srgbClr val="333333"/>
                 </a:solidFill>
@@ -13170,13 +14558,31 @@
               </a:spcAft>
             </a:pPr>
             <a:r>
-              <a:rPr sz="1300" b="0">
-                <a:solidFill>
-                  <a:srgbClr val="333333"/>
-                </a:solidFill>
-                <a:latin typeface="Calibri"/>
-              </a:rPr>
-              <a:t>• Has a conf/layer.conf identifying it</a:t>
+              <a:rPr sz="1600" b="0" dirty="0">
+                <a:solidFill>
+                  <a:srgbClr val="333333"/>
+                </a:solidFill>
+                <a:latin typeface="Calibri"/>
+              </a:rPr>
+              <a:t>• Has a conf/</a:t>
+            </a:r>
+            <a:r>
+              <a:rPr sz="1600" b="0" dirty="0" err="1">
+                <a:solidFill>
+                  <a:srgbClr val="333333"/>
+                </a:solidFill>
+                <a:latin typeface="Calibri"/>
+              </a:rPr>
+              <a:t>layer.conf</a:t>
+            </a:r>
+            <a:r>
+              <a:rPr sz="1600" b="0" dirty="0">
+                <a:solidFill>
+                  <a:srgbClr val="333333"/>
+                </a:solidFill>
+                <a:latin typeface="Calibri"/>
+              </a:rPr>
+              <a:t> identifying it</a:t>
             </a:r>
           </a:p>
           <a:p>
@@ -13186,13 +14592,13 @@
               </a:spcAft>
             </a:pPr>
             <a:r>
-              <a:rPr sz="1300" b="0">
-                <a:solidFill>
-                  <a:srgbClr val="333333"/>
-                </a:solidFill>
-                <a:latin typeface="Calibri"/>
-              </a:rPr>
-              <a:t>• Has a stable priority — higher overrides lower</a:t>
+              <a:rPr sz="1600" b="0" dirty="0">
+                <a:solidFill>
+                  <a:srgbClr val="333333"/>
+                </a:solidFill>
+                <a:latin typeface="Calibri"/>
+              </a:rPr>
+              <a:t>• Has a stable priority higher overrides lower</a:t>
             </a:r>
           </a:p>
           <a:p>
@@ -13202,7 +14608,7 @@
               </a:spcAft>
             </a:pPr>
             <a:r>
-              <a:rPr sz="1600" b="1">
+              <a:rPr sz="2000" b="1" dirty="0">
                 <a:solidFill>
                   <a:srgbClr val="CC0066"/>
                 </a:solidFill>
@@ -13218,14 +14624,29 @@
               </a:spcAft>
             </a:pPr>
             <a:r>
-              <a:rPr sz="1300" b="0">
-                <a:solidFill>
-                  <a:srgbClr val="333333"/>
-                </a:solidFill>
-                <a:latin typeface="Calibri"/>
-              </a:rPr>
-              <a:t>• Listed in build/conf/bblayers.conf</a:t>
-            </a:r>
+              <a:rPr sz="1600" b="0" dirty="0">
+                <a:solidFill>
+                  <a:srgbClr val="333333"/>
+                </a:solidFill>
+                <a:latin typeface="Calibri"/>
+              </a:rPr>
+              <a:t>• Listed in build/conf/</a:t>
+            </a:r>
+            <a:r>
+              <a:rPr sz="1600" b="0" dirty="0" err="1">
+                <a:solidFill>
+                  <a:srgbClr val="333333"/>
+                </a:solidFill>
+                <a:latin typeface="Calibri"/>
+              </a:rPr>
+              <a:t>bblayers.conf</a:t>
+            </a:r>
+            <a:endParaRPr sz="1600" b="0" dirty="0">
+              <a:solidFill>
+                <a:srgbClr val="333333"/>
+              </a:solidFill>
+              <a:latin typeface="Calibri"/>
+            </a:endParaRPr>
           </a:p>
           <a:p>
             <a:pPr>
@@ -13234,13 +14655,31 @@
               </a:spcAft>
             </a:pPr>
             <a:r>
-              <a:rPr sz="1300" b="0">
-                <a:solidFill>
-                  <a:srgbClr val="333333"/>
-                </a:solidFill>
-                <a:latin typeface="Calibri"/>
-              </a:rPr>
-              <a:t>• Use bitbake-layers add-layer / remove-layer</a:t>
+              <a:rPr sz="1600" b="0" dirty="0">
+                <a:solidFill>
+                  <a:srgbClr val="333333"/>
+                </a:solidFill>
+                <a:latin typeface="Calibri"/>
+              </a:rPr>
+              <a:t>• Use </a:t>
+            </a:r>
+            <a:r>
+              <a:rPr sz="1600" b="0" dirty="0" err="1">
+                <a:solidFill>
+                  <a:srgbClr val="333333"/>
+                </a:solidFill>
+                <a:latin typeface="Calibri"/>
+              </a:rPr>
+              <a:t>bitbake</a:t>
+            </a:r>
+            <a:r>
+              <a:rPr sz="1600" b="0" dirty="0">
+                <a:solidFill>
+                  <a:srgbClr val="333333"/>
+                </a:solidFill>
+                <a:latin typeface="Calibri"/>
+              </a:rPr>
+              <a:t>-layers add-layer / remove-layer</a:t>
             </a:r>
           </a:p>
         </p:txBody>
@@ -13289,7 +14728,7 @@
         <p:spPr>
           <a:xfrm>
             <a:off x="6263640" y="2286000"/>
-            <a:ext cx="5120640" cy="3657600"/>
+            <a:ext cx="5120640" cy="3118803"/>
           </a:xfrm>
           <a:prstGeom prst="rect">
             <a:avLst/>
@@ -13308,14 +14747,29 @@
               </a:spcAft>
             </a:pPr>
             <a:r>
-              <a:rPr sz="1300" b="1">
+              <a:rPr sz="1600" b="1" dirty="0">
                 <a:solidFill>
                   <a:srgbClr val="663399"/>
                 </a:solidFill>
                 <a:latin typeface="Calibri"/>
               </a:rPr>
-              <a:t>meta-openembedded</a:t>
-            </a:r>
+              <a:t>meta-</a:t>
+            </a:r>
+            <a:r>
+              <a:rPr sz="1600" b="1" dirty="0" err="1">
+                <a:solidFill>
+                  <a:srgbClr val="663399"/>
+                </a:solidFill>
+                <a:latin typeface="Calibri"/>
+              </a:rPr>
+              <a:t>openembedded</a:t>
+            </a:r>
+            <a:endParaRPr sz="1600" b="1" dirty="0">
+              <a:solidFill>
+                <a:srgbClr val="663399"/>
+              </a:solidFill>
+              <a:latin typeface="Calibri"/>
+            </a:endParaRPr>
           </a:p>
           <a:p>
             <a:pPr>
@@ -13324,7 +14778,7 @@
               </a:spcAft>
             </a:pPr>
             <a:r>
-              <a:rPr sz="1200" b="0">
+              <a:rPr sz="1600" b="0" dirty="0">
                 <a:solidFill>
                   <a:srgbClr val="333333"/>
                 </a:solidFill>
@@ -13340,14 +14794,29 @@
               </a:spcAft>
             </a:pPr>
             <a:r>
-              <a:rPr sz="1300" b="1">
+              <a:rPr sz="1600" b="1" dirty="0">
                 <a:solidFill>
                   <a:srgbClr val="663399"/>
                 </a:solidFill>
                 <a:latin typeface="Calibri"/>
               </a:rPr>
-              <a:t>meta-raspberrypi</a:t>
-            </a:r>
+              <a:t>meta-</a:t>
+            </a:r>
+            <a:r>
+              <a:rPr sz="1600" b="1" dirty="0" err="1">
+                <a:solidFill>
+                  <a:srgbClr val="663399"/>
+                </a:solidFill>
+                <a:latin typeface="Calibri"/>
+              </a:rPr>
+              <a:t>raspberrypi</a:t>
+            </a:r>
+            <a:endParaRPr sz="1600" b="1" dirty="0">
+              <a:solidFill>
+                <a:srgbClr val="663399"/>
+              </a:solidFill>
+              <a:latin typeface="Calibri"/>
+            </a:endParaRPr>
           </a:p>
           <a:p>
             <a:pPr>
@@ -13356,7 +14825,7 @@
               </a:spcAft>
             </a:pPr>
             <a:r>
-              <a:rPr sz="1200" b="0">
+              <a:rPr sz="1600" b="0" dirty="0">
                 <a:solidFill>
                   <a:srgbClr val="333333"/>
                 </a:solidFill>
@@ -13372,7 +14841,7 @@
               </a:spcAft>
             </a:pPr>
             <a:r>
-              <a:rPr sz="1300" b="1">
+              <a:rPr sz="1600" b="1" dirty="0">
                 <a:solidFill>
                   <a:srgbClr val="663399"/>
                 </a:solidFill>
@@ -13388,7 +14857,7 @@
               </a:spcAft>
             </a:pPr>
             <a:r>
-              <a:rPr sz="1200" b="0">
+              <a:rPr sz="1600" b="0" dirty="0">
                 <a:solidFill>
                   <a:srgbClr val="333333"/>
                 </a:solidFill>
@@ -13404,7 +14873,7 @@
               </a:spcAft>
             </a:pPr>
             <a:r>
-              <a:rPr sz="1300" b="1">
+              <a:rPr sz="1600" b="1" dirty="0">
                 <a:solidFill>
                   <a:srgbClr val="663399"/>
                 </a:solidFill>
@@ -13420,14 +14889,29 @@
               </a:spcAft>
             </a:pPr>
             <a:r>
-              <a:rPr sz="1200" b="0">
-                <a:solidFill>
-                  <a:srgbClr val="333333"/>
-                </a:solidFill>
-                <a:latin typeface="Calibri"/>
-              </a:rPr>
-              <a:t>Hardening tools, IMA, AppArmor</a:t>
-            </a:r>
+              <a:rPr sz="1600" b="0" dirty="0">
+                <a:solidFill>
+                  <a:srgbClr val="333333"/>
+                </a:solidFill>
+                <a:latin typeface="Calibri"/>
+              </a:rPr>
+              <a:t>Hardening tools, IMA, </a:t>
+            </a:r>
+            <a:r>
+              <a:rPr sz="1600" b="0" dirty="0" err="1">
+                <a:solidFill>
+                  <a:srgbClr val="333333"/>
+                </a:solidFill>
+                <a:latin typeface="Calibri"/>
+              </a:rPr>
+              <a:t>AppArmor</a:t>
+            </a:r>
+            <a:endParaRPr sz="1600" b="0" dirty="0">
+              <a:solidFill>
+                <a:srgbClr val="333333"/>
+              </a:solidFill>
+              <a:latin typeface="Calibri"/>
+            </a:endParaRPr>
           </a:p>
           <a:p>
             <a:pPr>
@@ -13436,14 +14920,29 @@
               </a:spcAft>
             </a:pPr>
             <a:r>
-              <a:rPr sz="1300" b="1">
+              <a:rPr sz="1600" b="1" dirty="0">
                 <a:solidFill>
                   <a:srgbClr val="CC0066"/>
                 </a:solidFill>
                 <a:latin typeface="Calibri"/>
               </a:rPr>
-              <a:t>meta-yourproduct</a:t>
-            </a:r>
+              <a:t>meta-</a:t>
+            </a:r>
+            <a:r>
+              <a:rPr sz="1600" b="1" dirty="0" err="1">
+                <a:solidFill>
+                  <a:srgbClr val="CC0066"/>
+                </a:solidFill>
+                <a:latin typeface="Calibri"/>
+              </a:rPr>
+              <a:t>yourproduct</a:t>
+            </a:r>
+            <a:endParaRPr sz="1600" b="1" dirty="0">
+              <a:solidFill>
+                <a:srgbClr val="CC0066"/>
+              </a:solidFill>
+              <a:latin typeface="Calibri"/>
+            </a:endParaRPr>
           </a:p>
           <a:p>
             <a:pPr>
@@ -13452,13 +14951,13 @@
               </a:spcAft>
             </a:pPr>
             <a:r>
-              <a:rPr sz="1200" b="0">
-                <a:solidFill>
-                  <a:srgbClr val="333333"/>
-                </a:solidFill>
-                <a:latin typeface="Calibri"/>
-              </a:rPr>
-              <a:t>Your layer — you'll build one in class</a:t>
+              <a:rPr sz="1600" b="0" dirty="0">
+                <a:solidFill>
+                  <a:srgbClr val="333333"/>
+                </a:solidFill>
+                <a:latin typeface="Calibri"/>
+              </a:rPr>
+              <a:t>Your layer you'll build one in class</a:t>
             </a:r>
           </a:p>
         </p:txBody>
@@ -13472,7 +14971,7 @@
         <p:spPr>
           <a:xfrm>
             <a:off x="822960" y="5669280"/>
-            <a:ext cx="10561320" cy="640080"/>
+            <a:ext cx="10561320" cy="338554"/>
           </a:xfrm>
           <a:prstGeom prst="rect">
             <a:avLst/>
@@ -13487,7 +14986,7 @@
           <a:p>
             <a:pPr algn="l"/>
             <a:r>
-              <a:rPr sz="1300" b="1">
+              <a:rPr sz="1600" b="1">
                 <a:solidFill>
                   <a:srgbClr val="663399"/>
                 </a:solidFill>
@@ -13539,13 +15038,22 @@
           <a:lstStyle/>
           <a:p>
             <a:r>
-              <a:rPr sz="3200" b="1">
-                <a:solidFill>
-                  <a:srgbClr val="CC0066"/>
-                </a:solidFill>
-                <a:latin typeface="Calibri"/>
-              </a:rPr>
-              <a:t>Recipes — The Building Blocks</a:t>
+              <a:rPr sz="3200" b="1" dirty="0">
+                <a:latin typeface="Calibri"/>
+              </a:rPr>
+              <a:t>Recipes </a:t>
+            </a:r>
+            <a:r>
+              <a:rPr lang="en-IN" sz="3200" b="1" dirty="0">
+                <a:latin typeface="Calibri"/>
+              </a:rPr>
+              <a:t>:</a:t>
+            </a:r>
+            <a:r>
+              <a:rPr sz="3200" b="1" dirty="0">
+                <a:latin typeface="Calibri"/>
+              </a:rPr>
+              <a:t> The Building Blocks</a:t>
             </a:r>
           </a:p>
         </p:txBody>
@@ -13559,7 +15067,7 @@
         <p:spPr>
           <a:xfrm>
             <a:off x="822960" y="1417320"/>
-            <a:ext cx="10515600" cy="365760"/>
+            <a:ext cx="10515600" cy="338554"/>
           </a:xfrm>
           <a:prstGeom prst="rect">
             <a:avLst/>
@@ -13574,7 +15082,7 @@
           <a:p>
             <a:pPr algn="l"/>
             <a:r>
-              <a:rPr sz="1500" b="0">
+              <a:rPr sz="1600" b="0" dirty="0">
                 <a:solidFill>
                   <a:srgbClr val="666666"/>
                 </a:solidFill>
@@ -13629,7 +15137,7 @@
         <p:spPr>
           <a:xfrm>
             <a:off x="822960" y="2286000"/>
-            <a:ext cx="5120640" cy="3657600"/>
+            <a:ext cx="5120640" cy="3739485"/>
           </a:xfrm>
           <a:prstGeom prst="rect">
             <a:avLst/>
@@ -13648,7 +15156,7 @@
               </a:spcAft>
             </a:pPr>
             <a:r>
-              <a:rPr sz="1200" b="1">
+              <a:rPr sz="1600" b="1">
                 <a:solidFill>
                   <a:srgbClr val="663399"/>
                 </a:solidFill>
@@ -13664,7 +15172,7 @@
               </a:spcAft>
             </a:pPr>
             <a:r>
-              <a:rPr sz="1200" b="0">
+              <a:rPr sz="1600" b="0">
                 <a:solidFill>
                   <a:srgbClr val="333333"/>
                 </a:solidFill>
@@ -13680,7 +15188,7 @@
               </a:spcAft>
             </a:pPr>
             <a:r>
-              <a:rPr sz="1200" b="1">
+              <a:rPr sz="1600" b="1">
                 <a:solidFill>
                   <a:srgbClr val="663399"/>
                 </a:solidFill>
@@ -13696,7 +15204,7 @@
               </a:spcAft>
             </a:pPr>
             <a:r>
-              <a:rPr sz="1200" b="0">
+              <a:rPr sz="1600" b="0">
                 <a:solidFill>
                   <a:srgbClr val="333333"/>
                 </a:solidFill>
@@ -13712,7 +15220,7 @@
               </a:spcAft>
             </a:pPr>
             <a:r>
-              <a:rPr sz="1200" b="1">
+              <a:rPr sz="1600" b="1">
                 <a:solidFill>
                   <a:srgbClr val="663399"/>
                 </a:solidFill>
@@ -13728,7 +15236,7 @@
               </a:spcAft>
             </a:pPr>
             <a:r>
-              <a:rPr sz="1200" b="0">
+              <a:rPr sz="1600" b="0">
                 <a:solidFill>
                   <a:srgbClr val="333333"/>
                 </a:solidFill>
@@ -13744,7 +15252,7 @@
               </a:spcAft>
             </a:pPr>
             <a:r>
-              <a:rPr sz="1200" b="1">
+              <a:rPr sz="1600" b="1">
                 <a:solidFill>
                   <a:srgbClr val="663399"/>
                 </a:solidFill>
@@ -13760,7 +15268,7 @@
               </a:spcAft>
             </a:pPr>
             <a:r>
-              <a:rPr sz="1200" b="0">
+              <a:rPr sz="1600" b="0">
                 <a:solidFill>
                   <a:srgbClr val="333333"/>
                 </a:solidFill>
@@ -13776,7 +15284,7 @@
               </a:spcAft>
             </a:pPr>
             <a:r>
-              <a:rPr sz="1200" b="1">
+              <a:rPr sz="1600" b="1">
                 <a:solidFill>
                   <a:srgbClr val="663399"/>
                 </a:solidFill>
@@ -13792,7 +15300,7 @@
               </a:spcAft>
             </a:pPr>
             <a:r>
-              <a:rPr sz="1200" b="0">
+              <a:rPr sz="1600" b="0">
                 <a:solidFill>
                   <a:srgbClr val="333333"/>
                 </a:solidFill>
@@ -13808,7 +15316,7 @@
               </a:spcAft>
             </a:pPr>
             <a:r>
-              <a:rPr sz="1200" b="1">
+              <a:rPr sz="1600" b="1">
                 <a:solidFill>
                   <a:srgbClr val="663399"/>
                 </a:solidFill>
@@ -13824,7 +15332,7 @@
               </a:spcAft>
             </a:pPr>
             <a:r>
-              <a:rPr sz="1200" b="0">
+              <a:rPr sz="1600" b="0">
                 <a:solidFill>
                   <a:srgbClr val="333333"/>
                 </a:solidFill>
@@ -13878,8 +15386,8 @@
         </p:nvSpPr>
         <p:spPr>
           <a:xfrm>
-            <a:off x="6263640" y="2286000"/>
-            <a:ext cx="5120640" cy="3657600"/>
+            <a:off x="6298053" y="2331718"/>
+            <a:ext cx="5120640" cy="3918155"/>
           </a:xfrm>
           <a:prstGeom prst="roundRect">
             <a:avLst/>
@@ -13925,7 +15433,7 @@
         </p:nvSpPr>
         <p:spPr>
           <a:xfrm>
-            <a:off x="6263640" y="2286000"/>
+            <a:off x="6263640" y="2527780"/>
             <a:ext cx="73152" cy="3657600"/>
           </a:xfrm>
           <a:prstGeom prst="rect">
@@ -13970,8 +15478,8 @@
         </p:nvSpPr>
         <p:spPr>
           <a:xfrm>
-            <a:off x="6446520" y="2377440"/>
-            <a:ext cx="4846320" cy="3474720"/>
+            <a:off x="6371205" y="2397969"/>
+            <a:ext cx="5257800" cy="3785652"/>
           </a:xfrm>
           <a:prstGeom prst="rect">
             <a:avLst/>
@@ -13990,7 +15498,7 @@
               </a:spcAft>
             </a:pPr>
             <a:r>
-              <a:rPr sz="1000">
+              <a:rPr sz="1600" dirty="0">
                 <a:solidFill>
                   <a:srgbClr val="2D2D2D"/>
                 </a:solidFill>
@@ -14006,13 +15514,31 @@
               </a:spcAft>
             </a:pPr>
             <a:r>
-              <a:rPr sz="1000">
+              <a:rPr sz="1600" dirty="0">
                 <a:solidFill>
                   <a:srgbClr val="2D2D2D"/>
                 </a:solidFill>
                 <a:latin typeface="Consolas"/>
               </a:rPr>
-              <a:t>DESCRIPTION = "BusyBox combines tiny ..."</a:t>
+              <a:t>DESCRIPTION = "</a:t>
+            </a:r>
+            <a:r>
+              <a:rPr sz="1600" dirty="0" err="1">
+                <a:solidFill>
+                  <a:srgbClr val="2D2D2D"/>
+                </a:solidFill>
+                <a:latin typeface="Consolas"/>
+              </a:rPr>
+              <a:t>BusyBox</a:t>
+            </a:r>
+            <a:r>
+              <a:rPr sz="1600" dirty="0">
+                <a:solidFill>
+                  <a:srgbClr val="2D2D2D"/>
+                </a:solidFill>
+                <a:latin typeface="Consolas"/>
+              </a:rPr>
+              <a:t> combines tiny ..."</a:t>
             </a:r>
           </a:p>
           <a:p>
@@ -14022,7 +15548,7 @@
               </a:spcAft>
             </a:pPr>
             <a:r>
-              <a:rPr sz="1000">
+              <a:rPr sz="1600" dirty="0">
                 <a:solidFill>
                   <a:srgbClr val="2D2D2D"/>
                 </a:solidFill>
@@ -14038,7 +15564,7 @@
               </a:spcAft>
             </a:pPr>
             <a:r>
-              <a:rPr sz="1000">
+              <a:rPr sz="1600" dirty="0">
                 <a:solidFill>
                   <a:srgbClr val="2D2D2D"/>
                 </a:solidFill>
@@ -14054,7 +15580,7 @@
               </a:spcAft>
             </a:pPr>
             <a:r>
-              <a:rPr sz="1000">
+              <a:rPr sz="1600" dirty="0">
                 <a:solidFill>
                   <a:srgbClr val="2D2D2D"/>
                 </a:solidFill>
@@ -14070,7 +15596,7 @@
               </a:spcAft>
             </a:pPr>
             <a:r>
-              <a:rPr sz="1000">
+              <a:rPr sz="1600" dirty="0">
                 <a:solidFill>
                   <a:srgbClr val="2D2D2D"/>
                 </a:solidFill>
@@ -14086,13 +15612,31 @@
               </a:spcAft>
             </a:pPr>
             <a:r>
-              <a:rPr sz="1000">
+              <a:rPr sz="1600" dirty="0">
                 <a:solidFill>
                   <a:srgbClr val="2D2D2D"/>
                 </a:solidFill>
                 <a:latin typeface="Consolas"/>
               </a:rPr>
-              <a:t>    busybox-${PV}.tar.bz2"</a:t>
+              <a:t>    </a:t>
+            </a:r>
+            <a:r>
+              <a:rPr sz="1600" dirty="0" err="1">
+                <a:solidFill>
+                  <a:srgbClr val="2D2D2D"/>
+                </a:solidFill>
+                <a:latin typeface="Consolas"/>
+              </a:rPr>
+              <a:t>busybox</a:t>
+            </a:r>
+            <a:r>
+              <a:rPr sz="1600" dirty="0">
+                <a:solidFill>
+                  <a:srgbClr val="2D2D2D"/>
+                </a:solidFill>
+                <a:latin typeface="Consolas"/>
+              </a:rPr>
+              <a:t>-${PV}.tar.bz2"</a:t>
             </a:r>
           </a:p>
           <a:p>
@@ -14102,13 +15646,31 @@
               </a:spcAft>
             </a:pPr>
             <a:r>
-              <a:rPr sz="1000">
+              <a:rPr sz="1600" dirty="0">
                 <a:solidFill>
                   <a:srgbClr val="2D2D2D"/>
                 </a:solidFill>
                 <a:latin typeface="Consolas"/>
               </a:rPr>
-              <a:t>S = "${WORKDIR}/busybox-${PV}"</a:t>
+              <a:t>S = "${WORKDIR}/</a:t>
+            </a:r>
+            <a:r>
+              <a:rPr sz="1600" dirty="0" err="1">
+                <a:solidFill>
+                  <a:srgbClr val="2D2D2D"/>
+                </a:solidFill>
+                <a:latin typeface="Consolas"/>
+              </a:rPr>
+              <a:t>busybox</a:t>
+            </a:r>
+            <a:r>
+              <a:rPr sz="1600" dirty="0">
+                <a:solidFill>
+                  <a:srgbClr val="2D2D2D"/>
+                </a:solidFill>
+                <a:latin typeface="Consolas"/>
+              </a:rPr>
+              <a:t>-${PV}"</a:t>
             </a:r>
           </a:p>
           <a:p>
@@ -14118,7 +15680,7 @@
               </a:spcAft>
             </a:pPr>
             <a:r>
-              <a:rPr sz="1000">
+              <a:rPr sz="1600" dirty="0">
                 <a:solidFill>
                   <a:srgbClr val="2D2D2D"/>
                 </a:solidFill>
@@ -14134,7 +15696,7 @@
               </a:spcAft>
             </a:pPr>
             <a:r>
-              <a:rPr sz="1000">
+              <a:rPr sz="1600" dirty="0">
                 <a:solidFill>
                   <a:srgbClr val="2D2D2D"/>
                 </a:solidFill>
@@ -14150,7 +15712,7 @@
               </a:spcAft>
             </a:pPr>
             <a:r>
-              <a:rPr sz="1000">
+              <a:rPr sz="1600" dirty="0">
                 <a:solidFill>
                   <a:srgbClr val="2D2D2D"/>
                 </a:solidFill>
@@ -14166,14 +15728,47 @@
               </a:spcAft>
             </a:pPr>
             <a:r>
-              <a:rPr sz="1000">
+              <a:rPr sz="1600" dirty="0">
                 <a:solidFill>
                   <a:srgbClr val="2D2D2D"/>
                 </a:solidFill>
                 <a:latin typeface="Consolas"/>
               </a:rPr>
-              <a:t>inherit cml1 systemd update-rc.d</a:t>
-            </a:r>
+              <a:t>inherit cml1 </a:t>
+            </a:r>
+            <a:r>
+              <a:rPr sz="1600" dirty="0" err="1">
+                <a:solidFill>
+                  <a:srgbClr val="2D2D2D"/>
+                </a:solidFill>
+                <a:latin typeface="Consolas"/>
+              </a:rPr>
+              <a:t>systemd</a:t>
+            </a:r>
+            <a:r>
+              <a:rPr sz="1600" dirty="0">
+                <a:solidFill>
+                  <a:srgbClr val="2D2D2D"/>
+                </a:solidFill>
+                <a:latin typeface="Consolas"/>
+              </a:rPr>
+              <a:t> update-</a:t>
+            </a:r>
+            <a:r>
+              <a:rPr sz="1600" dirty="0" err="1">
+                <a:solidFill>
+                  <a:srgbClr val="2D2D2D"/>
+                </a:solidFill>
+                <a:latin typeface="Consolas"/>
+              </a:rPr>
+              <a:t>rc.d</a:t>
+            </a:r>
+            <a:endParaRPr sz="1600" dirty="0">
+              <a:solidFill>
+                <a:srgbClr val="2D2D2D"/>
+              </a:solidFill>
+              <a:latin typeface="Consolas"/>
+            </a:endParaRPr>
           </a:p>
           <a:p>
             <a:pPr>
@@ -14182,7 +15777,7 @@
               </a:spcAft>
             </a:pPr>
             <a:r>
-              <a:rPr sz="1000">
+              <a:rPr sz="1600" dirty="0">
                 <a:solidFill>
                   <a:srgbClr val="2D2D2D"/>
                 </a:solidFill>
@@ -14198,14 +15793,65 @@
               </a:spcAft>
             </a:pPr>
             <a:r>
-              <a:rPr sz="1000" i="1">
+              <a:rPr sz="1600" i="1" dirty="0">
                 <a:solidFill>
                   <a:srgbClr val="808080"/>
                 </a:solidFill>
                 <a:latin typeface="Consolas"/>
               </a:rPr>
-              <a:t># Tasks: do_configure, do_compile, do_install</a:t>
-            </a:r>
+              <a:t># Tasks: </a:t>
+            </a:r>
+            <a:r>
+              <a:rPr sz="1600" i="1" dirty="0" err="1">
+                <a:solidFill>
+                  <a:srgbClr val="808080"/>
+                </a:solidFill>
+                <a:latin typeface="Consolas"/>
+              </a:rPr>
+              <a:t>do_configure</a:t>
+            </a:r>
+            <a:r>
+              <a:rPr sz="1600" i="1" dirty="0">
+                <a:solidFill>
+                  <a:srgbClr val="808080"/>
+                </a:solidFill>
+                <a:latin typeface="Consolas"/>
+              </a:rPr>
+              <a:t>, </a:t>
+            </a:r>
+            <a:r>
+              <a:rPr sz="1600" i="1" dirty="0" err="1">
+                <a:solidFill>
+                  <a:srgbClr val="808080"/>
+                </a:solidFill>
+                <a:latin typeface="Consolas"/>
+              </a:rPr>
+              <a:t>do_compile</a:t>
+            </a:r>
+            <a:r>
+              <a:rPr sz="1600" i="1" dirty="0">
+                <a:solidFill>
+                  <a:srgbClr val="808080"/>
+                </a:solidFill>
+                <a:latin typeface="Consolas"/>
+              </a:rPr>
+              <a:t>, </a:t>
+            </a:r>
+            <a:r>
+              <a:rPr sz="1600" i="1" dirty="0" err="1">
+                <a:solidFill>
+                  <a:srgbClr val="808080"/>
+                </a:solidFill>
+                <a:latin typeface="Consolas"/>
+              </a:rPr>
+              <a:t>do_install</a:t>
+            </a:r>
+            <a:endParaRPr sz="1600" i="1" dirty="0">
+              <a:solidFill>
+                <a:srgbClr val="808080"/>
+              </a:solidFill>
+              <a:latin typeface="Consolas"/>
+            </a:endParaRPr>
           </a:p>
           <a:p>
             <a:pPr>
@@ -14214,7 +15860,7 @@
               </a:spcAft>
             </a:pPr>
             <a:r>
-              <a:rPr sz="1000" i="1">
+              <a:rPr sz="1600" i="1" dirty="0">
                 <a:solidFill>
                   <a:srgbClr val="808080"/>
                 </a:solidFill>
